--- a/slides/Module_06_Review_Hygiene.pptx
+++ b/slides/Module_06_Review_Hygiene.pptx
@@ -2689,7 +2689,7 @@
                   <a:srgbClr val="5B8DB8"/>
                 </a:solidFill>
               </a:rPr>
-              <a:t>METRICS FOR A HEALTHY AGENTIC TEAM</a:t>
+              <a:t>SLOs FOR AGENTIC SYSTEMS  —  TWO LEVELS</a:t>
             </a:r>
             <a:endParaRPr lang="en-US" sz="1300" dirty="0"/>
           </a:p>
@@ -2720,14 +2720,14 @@
               <a:buNone/>
             </a:pPr>
             <a:r>
-              <a:rPr lang="en-US" sz="1500" i="1" dirty="0">
+              <a:rPr lang="en-US" sz="1400" i="1" dirty="0">
                 <a:solidFill>
                   <a:srgbClr val="FFFFFF"/>
                 </a:solidFill>
               </a:rPr>
-              <a:t>If you can’t measure it, you can’t improve it. Track these to know if your agentic process is working.</a:t>
-            </a:r>
-            <a:endParaRPr lang="en-US" sz="1500" dirty="0"/>
+              <a:t>SLOs apply at both levels — the coding agent loop and production agents. Define them before you deploy, not after.</a:t>
+            </a:r>
+            <a:endParaRPr lang="en-US" sz="1400" dirty="0"/>
           </a:p>
         </p:txBody>
       </p:sp>
@@ -2739,8 +2739,8 @@
         </p:nvSpPr>
         <p:spPr>
           <a:xfrm>
-            <a:off x="320040" y="1143000"/>
-            <a:ext cx="2697480" cy="3794760"/>
+            <a:off x="320040" y="1115568"/>
+            <a:ext cx="4160520" cy="3767328"/>
           </a:xfrm>
           <a:prstGeom prst="rect">
             <a:avLst/>
@@ -2768,14 +2768,108 @@
         </p:nvSpPr>
         <p:spPr>
           <a:xfrm>
-            <a:off x="320040" y="1143000"/>
-            <a:ext cx="2697480" cy="384048"/>
-          </a:xfrm>
-          <a:prstGeom prst="rect">
-            <a:avLst/>
-          </a:prstGeom>
-          <a:solidFill>
-            <a:srgbClr val="3A7DC9">
+            <a:off x="320040" y="1115568"/>
+            <a:ext cx="4160520" cy="438912"/>
+          </a:xfrm>
+          <a:prstGeom prst="rect">
+            <a:avLst/>
+          </a:prstGeom>
+          <a:solidFill>
+            <a:srgbClr val="4A7FA8">
+              <a:alpha val="95000"/>
+            </a:srgbClr>
+          </a:solidFill>
+          <a:ln/>
+        </p:spPr>
+      </p:sp>
+      <p:sp>
+        <p:nvSpPr>
+          <p:cNvPr id="6" name="Text 4"/>
+          <p:cNvSpPr/>
+          <p:nvPr/>
+        </p:nvSpPr>
+        <p:spPr>
+          <a:xfrm>
+            <a:off x="320040" y="1115568"/>
+            <a:ext cx="4160520" cy="438912"/>
+          </a:xfrm>
+          <a:prstGeom prst="rect">
+            <a:avLst/>
+          </a:prstGeom>
+          <a:noFill/>
+          <a:ln/>
+        </p:spPr>
+        <p:txBody>
+          <a:bodyPr wrap="square" lIns="0" tIns="0" rIns="0" bIns="0" rtlCol="0" anchor="ctr"/>
+          <a:lstStyle/>
+          <a:p>
+            <a:pPr algn="ctr" indent="0" marL="0">
+              <a:buNone/>
+            </a:pPr>
+            <a:r>
+              <a:rPr lang="en-US" sz="1100" b="1" spc="200" kern="0" dirty="0">
+                <a:solidFill>
+                  <a:srgbClr val="FFFFFF"/>
+                </a:solidFill>
+              </a:rPr>
+              <a:t>CODING AGENT WORKFLOW SLOs</a:t>
+            </a:r>
+            <a:endParaRPr lang="en-US" sz="1100" dirty="0"/>
+          </a:p>
+        </p:txBody>
+      </p:sp>
+      <p:sp>
+        <p:nvSpPr>
+          <p:cNvPr id="7" name="Text 5"/>
+          <p:cNvSpPr/>
+          <p:nvPr/>
+        </p:nvSpPr>
+        <p:spPr>
+          <a:xfrm>
+            <a:off x="411480" y="1609344"/>
+            <a:ext cx="3977640" cy="237744"/>
+          </a:xfrm>
+          <a:prstGeom prst="rect">
+            <a:avLst/>
+          </a:prstGeom>
+          <a:noFill/>
+          <a:ln/>
+        </p:spPr>
+        <p:txBody>
+          <a:bodyPr wrap="square" lIns="0" tIns="0" rIns="0" bIns="0" rtlCol="0" anchor="ctr"/>
+          <a:lstStyle/>
+          <a:p>
+            <a:pPr indent="0" marL="0">
+              <a:buNone/>
+            </a:pPr>
+            <a:r>
+              <a:rPr lang="en-US" sz="1000" i="1" dirty="0">
+                <a:solidFill>
+                  <a:srgbClr val="5B8DB8"/>
+                </a:solidFill>
+              </a:rPr>
+              <a:t>Measuring the development loop (Claude Code, Copilot)</a:t>
+            </a:r>
+            <a:endParaRPr lang="en-US" sz="1000" dirty="0"/>
+          </a:p>
+        </p:txBody>
+      </p:sp>
+      <p:sp>
+        <p:nvSpPr>
+          <p:cNvPr id="8" name="Shape 6"/>
+          <p:cNvSpPr/>
+          <p:nvPr/>
+        </p:nvSpPr>
+        <p:spPr>
+          <a:xfrm>
+            <a:off x="411480" y="1920240"/>
+            <a:ext cx="3977640" cy="640080"/>
+          </a:xfrm>
+          <a:prstGeom prst="rect">
+            <a:avLst/>
+          </a:prstGeom>
+          <a:solidFill>
+            <a:srgbClr val="1C3557">
               <a:alpha val="90000"/>
             </a:srgbClr>
           </a:solidFill>
@@ -2784,14 +2878,92 @@
       </p:sp>
       <p:sp>
         <p:nvSpPr>
-          <p:cNvPr id="6" name="Text 4"/>
-          <p:cNvSpPr/>
-          <p:nvPr/>
-        </p:nvSpPr>
-        <p:spPr>
-          <a:xfrm>
-            <a:off x="320040" y="1143000"/>
-            <a:ext cx="2697480" cy="384048"/>
+          <p:cNvPr id="9" name="Shape 7"/>
+          <p:cNvSpPr/>
+          <p:nvPr/>
+        </p:nvSpPr>
+        <p:spPr>
+          <a:xfrm>
+            <a:off x="411480" y="1920240"/>
+            <a:ext cx="54864" cy="640080"/>
+          </a:xfrm>
+          <a:prstGeom prst="rect">
+            <a:avLst/>
+          </a:prstGeom>
+          <a:solidFill>
+            <a:srgbClr val="4A7FA8"/>
+          </a:solidFill>
+          <a:ln/>
+        </p:spPr>
+      </p:sp>
+      <p:sp>
+        <p:nvSpPr>
+          <p:cNvPr id="10" name="Text 8"/>
+          <p:cNvSpPr/>
+          <p:nvPr/>
+        </p:nvSpPr>
+        <p:spPr>
+          <a:xfrm>
+            <a:off x="530352" y="1965960"/>
+            <a:ext cx="2377440" cy="256032"/>
+          </a:xfrm>
+          <a:prstGeom prst="rect">
+            <a:avLst/>
+          </a:prstGeom>
+          <a:noFill/>
+          <a:ln/>
+        </p:spPr>
+        <p:txBody>
+          <a:bodyPr wrap="square" lIns="0" tIns="0" rIns="0" bIns="0" rtlCol="0" anchor="ctr"/>
+          <a:lstStyle/>
+          <a:p>
+            <a:pPr indent="0" marL="0">
+              <a:buNone/>
+            </a:pPr>
+            <a:r>
+              <a:rPr lang="en-US" sz="1150" b="1" dirty="0">
+                <a:solidFill>
+                  <a:srgbClr val="3A7DC9"/>
+                </a:solidFill>
+              </a:rPr>
+              <a:t>pr_open_rate</a:t>
+            </a:r>
+            <a:endParaRPr lang="en-US" sz="1150" dirty="0"/>
+          </a:p>
+        </p:txBody>
+      </p:sp>
+      <p:sp>
+        <p:nvSpPr>
+          <p:cNvPr id="11" name="Shape 9"/>
+          <p:cNvSpPr/>
+          <p:nvPr/>
+        </p:nvSpPr>
+        <p:spPr>
+          <a:xfrm>
+            <a:off x="3017520" y="1975104"/>
+            <a:ext cx="1298448" cy="256032"/>
+          </a:xfrm>
+          <a:prstGeom prst="rect">
+            <a:avLst/>
+          </a:prstGeom>
+          <a:solidFill>
+            <a:srgbClr val="4A7FA8">
+              <a:alpha val="40000"/>
+            </a:srgbClr>
+          </a:solidFill>
+          <a:ln/>
+        </p:spPr>
+      </p:sp>
+      <p:sp>
+        <p:nvSpPr>
+          <p:cNvPr id="12" name="Text 10"/>
+          <p:cNvSpPr/>
+          <p:nvPr/>
+        </p:nvSpPr>
+        <p:spPr>
+          <a:xfrm>
+            <a:off x="3017520" y="1975104"/>
+            <a:ext cx="1298448" cy="256032"/>
           </a:xfrm>
           <a:prstGeom prst="rect">
             <a:avLst/>
@@ -2807,83 +2979,199 @@
               <a:buNone/>
             </a:pPr>
             <a:r>
-              <a:rPr lang="en-US" sz="1300" b="1" spc="200" kern="0" dirty="0">
+              <a:rPr lang="en-US" sz="950" b="1" dirty="0">
                 <a:solidFill>
                   <a:srgbClr val="FFFFFF"/>
                 </a:solidFill>
               </a:rPr>
-              <a:t>Quality</a:t>
-            </a:r>
-            <a:endParaRPr lang="en-US" sz="1300" dirty="0"/>
-          </a:p>
-        </p:txBody>
-      </p:sp>
-      <p:sp>
-        <p:nvSpPr>
-          <p:cNvPr id="7" name="Shape 5"/>
-          <p:cNvSpPr/>
-          <p:nvPr/>
-        </p:nvSpPr>
-        <p:spPr>
-          <a:xfrm>
-            <a:off x="411480" y="1618488"/>
-            <a:ext cx="2514600" cy="1005840"/>
-          </a:xfrm>
-          <a:prstGeom prst="rect">
-            <a:avLst/>
-          </a:prstGeom>
-          <a:solidFill>
-            <a:srgbClr val="1C3557"/>
-          </a:solidFill>
-          <a:ln/>
-        </p:spPr>
-      </p:sp>
-      <p:sp>
-        <p:nvSpPr>
-          <p:cNvPr id="8" name="Text 6"/>
-          <p:cNvSpPr/>
-          <p:nvPr/>
-        </p:nvSpPr>
-        <p:spPr>
-          <a:xfrm>
-            <a:off x="484632" y="1673352"/>
-            <a:ext cx="2368296" cy="292608"/>
-          </a:xfrm>
-          <a:prstGeom prst="rect">
-            <a:avLst/>
-          </a:prstGeom>
-          <a:noFill/>
-          <a:ln/>
-        </p:spPr>
-        <p:txBody>
-          <a:bodyPr wrap="square" lIns="0" tIns="0" rIns="0" bIns="0" rtlCol="0" anchor="ctr"/>
-          <a:lstStyle/>
-          <a:p>
-            <a:pPr indent="0" marL="0">
-              <a:buNone/>
-            </a:pPr>
-            <a:r>
-              <a:rPr lang="en-US" sz="1100" b="1" dirty="0">
+              <a:t>target: 90%  ·  7d</a:t>
+            </a:r>
+            <a:endParaRPr lang="en-US" sz="950" dirty="0"/>
+          </a:p>
+        </p:txBody>
+      </p:sp>
+      <p:sp>
+        <p:nvSpPr>
+          <p:cNvPr id="13" name="Text 11"/>
+          <p:cNvSpPr/>
+          <p:nvPr/>
+        </p:nvSpPr>
+        <p:spPr>
+          <a:xfrm>
+            <a:off x="530352" y="2249424"/>
+            <a:ext cx="3749040" cy="256032"/>
+          </a:xfrm>
+          <a:prstGeom prst="rect">
+            <a:avLst/>
+          </a:prstGeom>
+          <a:noFill/>
+          <a:ln/>
+        </p:spPr>
+        <p:txBody>
+          <a:bodyPr wrap="square" lIns="0" tIns="0" rIns="0" bIns="0" rtlCol="0" anchor="ctr"/>
+          <a:lstStyle/>
+          <a:p>
+            <a:pPr indent="0" marL="0">
+              <a:buNone/>
+            </a:pPr>
+            <a:r>
+              <a:rPr lang="en-US" sz="1000" dirty="0">
+                <a:solidFill>
+                  <a:srgbClr val="D4E4F0"/>
+                </a:solidFill>
+              </a:rPr>
+              <a:t>% of agent tasks that successfully open a PR</a:t>
+            </a:r>
+            <a:endParaRPr lang="en-US" sz="1000" dirty="0"/>
+          </a:p>
+        </p:txBody>
+      </p:sp>
+      <p:sp>
+        <p:nvSpPr>
+          <p:cNvPr id="14" name="Shape 12"/>
+          <p:cNvSpPr/>
+          <p:nvPr/>
+        </p:nvSpPr>
+        <p:spPr>
+          <a:xfrm>
+            <a:off x="411480" y="2633472"/>
+            <a:ext cx="3977640" cy="640080"/>
+          </a:xfrm>
+          <a:prstGeom prst="rect">
+            <a:avLst/>
+          </a:prstGeom>
+          <a:solidFill>
+            <a:srgbClr val="1C3557">
+              <a:alpha val="90000"/>
+            </a:srgbClr>
+          </a:solidFill>
+          <a:ln/>
+        </p:spPr>
+      </p:sp>
+      <p:sp>
+        <p:nvSpPr>
+          <p:cNvPr id="15" name="Shape 13"/>
+          <p:cNvSpPr/>
+          <p:nvPr/>
+        </p:nvSpPr>
+        <p:spPr>
+          <a:xfrm>
+            <a:off x="411480" y="2633472"/>
+            <a:ext cx="54864" cy="640080"/>
+          </a:xfrm>
+          <a:prstGeom prst="rect">
+            <a:avLst/>
+          </a:prstGeom>
+          <a:solidFill>
+            <a:srgbClr val="4A7FA8"/>
+          </a:solidFill>
+          <a:ln/>
+        </p:spPr>
+      </p:sp>
+      <p:sp>
+        <p:nvSpPr>
+          <p:cNvPr id="16" name="Text 14"/>
+          <p:cNvSpPr/>
+          <p:nvPr/>
+        </p:nvSpPr>
+        <p:spPr>
+          <a:xfrm>
+            <a:off x="530352" y="2679192"/>
+            <a:ext cx="2377440" cy="256032"/>
+          </a:xfrm>
+          <a:prstGeom prst="rect">
+            <a:avLst/>
+          </a:prstGeom>
+          <a:noFill/>
+          <a:ln/>
+        </p:spPr>
+        <p:txBody>
+          <a:bodyPr wrap="square" lIns="0" tIns="0" rIns="0" bIns="0" rtlCol="0" anchor="ctr"/>
+          <a:lstStyle/>
+          <a:p>
+            <a:pPr indent="0" marL="0">
+              <a:buNone/>
+            </a:pPr>
+            <a:r>
+              <a:rPr lang="en-US" sz="1150" b="1" dirty="0">
                 <a:solidFill>
                   <a:srgbClr val="3A7DC9"/>
                 </a:solidFill>
               </a:rPr>
-              <a:t>Agent PR failure mode ratio</a:t>
-            </a:r>
-            <a:endParaRPr lang="en-US" sz="1100" dirty="0"/>
-          </a:p>
-        </p:txBody>
-      </p:sp>
-      <p:sp>
-        <p:nvSpPr>
-          <p:cNvPr id="9" name="Text 7"/>
-          <p:cNvSpPr/>
-          <p:nvPr/>
-        </p:nvSpPr>
-        <p:spPr>
-          <a:xfrm>
-            <a:off x="484632" y="2002536"/>
-            <a:ext cx="2368296" cy="548640"/>
+              <a:t>task_success_rate</a:t>
+            </a:r>
+            <a:endParaRPr lang="en-US" sz="1150" dirty="0"/>
+          </a:p>
+        </p:txBody>
+      </p:sp>
+      <p:sp>
+        <p:nvSpPr>
+          <p:cNvPr id="17" name="Shape 15"/>
+          <p:cNvSpPr/>
+          <p:nvPr/>
+        </p:nvSpPr>
+        <p:spPr>
+          <a:xfrm>
+            <a:off x="3017520" y="2688336"/>
+            <a:ext cx="1298448" cy="256032"/>
+          </a:xfrm>
+          <a:prstGeom prst="rect">
+            <a:avLst/>
+          </a:prstGeom>
+          <a:solidFill>
+            <a:srgbClr val="4A7FA8">
+              <a:alpha val="40000"/>
+            </a:srgbClr>
+          </a:solidFill>
+          <a:ln/>
+        </p:spPr>
+      </p:sp>
+      <p:sp>
+        <p:nvSpPr>
+          <p:cNvPr id="18" name="Text 16"/>
+          <p:cNvSpPr/>
+          <p:nvPr/>
+        </p:nvSpPr>
+        <p:spPr>
+          <a:xfrm>
+            <a:off x="3017520" y="2688336"/>
+            <a:ext cx="1298448" cy="256032"/>
+          </a:xfrm>
+          <a:prstGeom prst="rect">
+            <a:avLst/>
+          </a:prstGeom>
+          <a:noFill/>
+          <a:ln/>
+        </p:spPr>
+        <p:txBody>
+          <a:bodyPr wrap="square" lIns="0" tIns="0" rIns="0" bIns="0" rtlCol="0" anchor="ctr"/>
+          <a:lstStyle/>
+          <a:p>
+            <a:pPr algn="ctr" indent="0" marL="0">
+              <a:buNone/>
+            </a:pPr>
+            <a:r>
+              <a:rPr lang="en-US" sz="950" b="1" dirty="0">
+                <a:solidFill>
+                  <a:srgbClr val="FFFFFF"/>
+                </a:solidFill>
+              </a:rPr>
+              <a:t>target: 80%  ·  7d</a:t>
+            </a:r>
+            <a:endParaRPr lang="en-US" sz="950" dirty="0"/>
+          </a:p>
+        </p:txBody>
+      </p:sp>
+      <p:sp>
+        <p:nvSpPr>
+          <p:cNvPr id="19" name="Text 17"/>
+          <p:cNvSpPr/>
+          <p:nvPr/>
+        </p:nvSpPr>
+        <p:spPr>
+          <a:xfrm>
+            <a:off x="530352" y="2962656"/>
+            <a:ext cx="3749040" cy="256032"/>
           </a:xfrm>
           <a:prstGeom prst="rect">
             <a:avLst/>
@@ -2904,7 +3192,7 @@
                   <a:srgbClr val="D4E4F0"/>
                 </a:solidFill>
               </a:rPr>
-              <a:t>% of PRs in each of the 3 failure modes. Shift over time shows Verifier maturity.</a:t>
+              <a:t>% of agent runs completing without human intervention</a:t>
             </a:r>
             <a:endParaRPr lang="en-US" sz="1000" dirty="0"/>
           </a:p>
@@ -2912,70 +3200,150 @@
       </p:sp>
       <p:sp>
         <p:nvSpPr>
-          <p:cNvPr id="10" name="Shape 8"/>
-          <p:cNvSpPr/>
-          <p:nvPr/>
-        </p:nvSpPr>
-        <p:spPr>
-          <a:xfrm>
-            <a:off x="411480" y="2697480"/>
-            <a:ext cx="2514600" cy="1005840"/>
-          </a:xfrm>
-          <a:prstGeom prst="rect">
-            <a:avLst/>
-          </a:prstGeom>
-          <a:solidFill>
-            <a:srgbClr val="1C3557"/>
-          </a:solidFill>
-          <a:ln/>
-        </p:spPr>
-      </p:sp>
-      <p:sp>
-        <p:nvSpPr>
-          <p:cNvPr id="11" name="Text 9"/>
-          <p:cNvSpPr/>
-          <p:nvPr/>
-        </p:nvSpPr>
-        <p:spPr>
-          <a:xfrm>
-            <a:off x="484632" y="2752344"/>
-            <a:ext cx="2368296" cy="292608"/>
-          </a:xfrm>
-          <a:prstGeom prst="rect">
-            <a:avLst/>
-          </a:prstGeom>
-          <a:noFill/>
-          <a:ln/>
-        </p:spPr>
-        <p:txBody>
-          <a:bodyPr wrap="square" lIns="0" tIns="0" rIns="0" bIns="0" rtlCol="0" anchor="ctr"/>
-          <a:lstStyle/>
-          <a:p>
-            <a:pPr indent="0" marL="0">
-              <a:buNone/>
-            </a:pPr>
-            <a:r>
-              <a:rPr lang="en-US" sz="1100" b="1" dirty="0">
+          <p:cNvPr id="20" name="Shape 18"/>
+          <p:cNvSpPr/>
+          <p:nvPr/>
+        </p:nvSpPr>
+        <p:spPr>
+          <a:xfrm>
+            <a:off x="411480" y="3346704"/>
+            <a:ext cx="3977640" cy="640080"/>
+          </a:xfrm>
+          <a:prstGeom prst="rect">
+            <a:avLst/>
+          </a:prstGeom>
+          <a:solidFill>
+            <a:srgbClr val="1C3557">
+              <a:alpha val="90000"/>
+            </a:srgbClr>
+          </a:solidFill>
+          <a:ln/>
+        </p:spPr>
+      </p:sp>
+      <p:sp>
+        <p:nvSpPr>
+          <p:cNvPr id="21" name="Shape 19"/>
+          <p:cNvSpPr/>
+          <p:nvPr/>
+        </p:nvSpPr>
+        <p:spPr>
+          <a:xfrm>
+            <a:off x="411480" y="3346704"/>
+            <a:ext cx="54864" cy="640080"/>
+          </a:xfrm>
+          <a:prstGeom prst="rect">
+            <a:avLst/>
+          </a:prstGeom>
+          <a:solidFill>
+            <a:srgbClr val="4A7FA8"/>
+          </a:solidFill>
+          <a:ln/>
+        </p:spPr>
+      </p:sp>
+      <p:sp>
+        <p:nvSpPr>
+          <p:cNvPr id="22" name="Text 20"/>
+          <p:cNvSpPr/>
+          <p:nvPr/>
+        </p:nvSpPr>
+        <p:spPr>
+          <a:xfrm>
+            <a:off x="530352" y="3392424"/>
+            <a:ext cx="2377440" cy="256032"/>
+          </a:xfrm>
+          <a:prstGeom prst="rect">
+            <a:avLst/>
+          </a:prstGeom>
+          <a:noFill/>
+          <a:ln/>
+        </p:spPr>
+        <p:txBody>
+          <a:bodyPr wrap="square" lIns="0" tIns="0" rIns="0" bIns="0" rtlCol="0" anchor="ctr"/>
+          <a:lstStyle/>
+          <a:p>
+            <a:pPr indent="0" marL="0">
+              <a:buNone/>
+            </a:pPr>
+            <a:r>
+              <a:rPr lang="en-US" sz="1150" b="1" dirty="0">
                 <a:solidFill>
                   <a:srgbClr val="3A7DC9"/>
                 </a:solidFill>
               </a:rPr>
-              <a:t>AC coverage per PR</a:t>
-            </a:r>
-            <a:endParaRPr lang="en-US" sz="1100" dirty="0"/>
-          </a:p>
-        </p:txBody>
-      </p:sp>
-      <p:sp>
-        <p:nvSpPr>
-          <p:cNvPr id="12" name="Text 10"/>
-          <p:cNvSpPr/>
-          <p:nvPr/>
-        </p:nvSpPr>
-        <p:spPr>
-          <a:xfrm>
-            <a:off x="484632" y="3081528"/>
-            <a:ext cx="2368296" cy="548640"/>
+              <a:t>eval_score</a:t>
+            </a:r>
+            <a:endParaRPr lang="en-US" sz="1150" dirty="0"/>
+          </a:p>
+        </p:txBody>
+      </p:sp>
+      <p:sp>
+        <p:nvSpPr>
+          <p:cNvPr id="23" name="Shape 21"/>
+          <p:cNvSpPr/>
+          <p:nvPr/>
+        </p:nvSpPr>
+        <p:spPr>
+          <a:xfrm>
+            <a:off x="3017520" y="3401568"/>
+            <a:ext cx="1298448" cy="256032"/>
+          </a:xfrm>
+          <a:prstGeom prst="rect">
+            <a:avLst/>
+          </a:prstGeom>
+          <a:solidFill>
+            <a:srgbClr val="4A7FA8">
+              <a:alpha val="40000"/>
+            </a:srgbClr>
+          </a:solidFill>
+          <a:ln/>
+        </p:spPr>
+      </p:sp>
+      <p:sp>
+        <p:nvSpPr>
+          <p:cNvPr id="24" name="Text 22"/>
+          <p:cNvSpPr/>
+          <p:nvPr/>
+        </p:nvSpPr>
+        <p:spPr>
+          <a:xfrm>
+            <a:off x="3017520" y="3401568"/>
+            <a:ext cx="1298448" cy="256032"/>
+          </a:xfrm>
+          <a:prstGeom prst="rect">
+            <a:avLst/>
+          </a:prstGeom>
+          <a:noFill/>
+          <a:ln/>
+        </p:spPr>
+        <p:txBody>
+          <a:bodyPr wrap="square" lIns="0" tIns="0" rIns="0" bIns="0" rtlCol="0" anchor="ctr"/>
+          <a:lstStyle/>
+          <a:p>
+            <a:pPr algn="ctr" indent="0" marL="0">
+              <a:buNone/>
+            </a:pPr>
+            <a:r>
+              <a:rPr lang="en-US" sz="950" b="1" dirty="0">
+                <a:solidFill>
+                  <a:srgbClr val="FFFFFF"/>
+                </a:solidFill>
+              </a:rPr>
+              <a:t>target: 0.85  ·  7d</a:t>
+            </a:r>
+            <a:endParaRPr lang="en-US" sz="950" dirty="0"/>
+          </a:p>
+        </p:txBody>
+      </p:sp>
+      <p:sp>
+        <p:nvSpPr>
+          <p:cNvPr id="25" name="Text 23"/>
+          <p:cNvSpPr/>
+          <p:nvPr/>
+        </p:nvSpPr>
+        <p:spPr>
+          <a:xfrm>
+            <a:off x="530352" y="3675888"/>
+            <a:ext cx="3749040" cy="256032"/>
           </a:xfrm>
           <a:prstGeom prst="rect">
             <a:avLst/>
@@ -2996,7 +3364,7 @@
                   <a:srgbClr val="D4E4F0"/>
                 </a:solidFill>
               </a:rPr>
-              <a:t>% of AC items covered by tests. Target: 100%. Decline indicates spec quality issue.</a:t>
+              <a:t>Automated quality review pass rate for agent-generated PRs</a:t>
             </a:r>
             <a:endParaRPr lang="en-US" sz="1000" dirty="0"/>
           </a:p>
@@ -3004,70 +3372,150 @@
       </p:sp>
       <p:sp>
         <p:nvSpPr>
-          <p:cNvPr id="13" name="Shape 11"/>
-          <p:cNvSpPr/>
-          <p:nvPr/>
-        </p:nvSpPr>
-        <p:spPr>
-          <a:xfrm>
-            <a:off x="411480" y="3776472"/>
-            <a:ext cx="2514600" cy="1005840"/>
-          </a:xfrm>
-          <a:prstGeom prst="rect">
-            <a:avLst/>
-          </a:prstGeom>
-          <a:solidFill>
-            <a:srgbClr val="1C3557"/>
-          </a:solidFill>
-          <a:ln/>
-        </p:spPr>
-      </p:sp>
-      <p:sp>
-        <p:nvSpPr>
-          <p:cNvPr id="14" name="Text 12"/>
-          <p:cNvSpPr/>
-          <p:nvPr/>
-        </p:nvSpPr>
-        <p:spPr>
-          <a:xfrm>
-            <a:off x="484632" y="3831336"/>
-            <a:ext cx="2368296" cy="292608"/>
-          </a:xfrm>
-          <a:prstGeom prst="rect">
-            <a:avLst/>
-          </a:prstGeom>
-          <a:noFill/>
-          <a:ln/>
-        </p:spPr>
-        <p:txBody>
-          <a:bodyPr wrap="square" lIns="0" tIns="0" rIns="0" bIns="0" rtlCol="0" anchor="ctr"/>
-          <a:lstStyle/>
-          <a:p>
-            <a:pPr indent="0" marL="0">
-              <a:buNone/>
-            </a:pPr>
-            <a:r>
-              <a:rPr lang="en-US" sz="1100" b="1" dirty="0">
+          <p:cNvPr id="26" name="Shape 24"/>
+          <p:cNvSpPr/>
+          <p:nvPr/>
+        </p:nvSpPr>
+        <p:spPr>
+          <a:xfrm>
+            <a:off x="411480" y="4059936"/>
+            <a:ext cx="3977640" cy="640080"/>
+          </a:xfrm>
+          <a:prstGeom prst="rect">
+            <a:avLst/>
+          </a:prstGeom>
+          <a:solidFill>
+            <a:srgbClr val="1C3557">
+              <a:alpha val="90000"/>
+            </a:srgbClr>
+          </a:solidFill>
+          <a:ln/>
+        </p:spPr>
+      </p:sp>
+      <p:sp>
+        <p:nvSpPr>
+          <p:cNvPr id="27" name="Shape 25"/>
+          <p:cNvSpPr/>
+          <p:nvPr/>
+        </p:nvSpPr>
+        <p:spPr>
+          <a:xfrm>
+            <a:off x="411480" y="4059936"/>
+            <a:ext cx="54864" cy="640080"/>
+          </a:xfrm>
+          <a:prstGeom prst="rect">
+            <a:avLst/>
+          </a:prstGeom>
+          <a:solidFill>
+            <a:srgbClr val="4A7FA8"/>
+          </a:solidFill>
+          <a:ln/>
+        </p:spPr>
+      </p:sp>
+      <p:sp>
+        <p:nvSpPr>
+          <p:cNvPr id="28" name="Text 26"/>
+          <p:cNvSpPr/>
+          <p:nvPr/>
+        </p:nvSpPr>
+        <p:spPr>
+          <a:xfrm>
+            <a:off x="530352" y="4105656"/>
+            <a:ext cx="2377440" cy="256032"/>
+          </a:xfrm>
+          <a:prstGeom prst="rect">
+            <a:avLst/>
+          </a:prstGeom>
+          <a:noFill/>
+          <a:ln/>
+        </p:spPr>
+        <p:txBody>
+          <a:bodyPr wrap="square" lIns="0" tIns="0" rIns="0" bIns="0" rtlCol="0" anchor="ctr"/>
+          <a:lstStyle/>
+          <a:p>
+            <a:pPr indent="0" marL="0">
+              <a:buNone/>
+            </a:pPr>
+            <a:r>
+              <a:rPr lang="en-US" sz="1150" b="1" dirty="0">
                 <a:solidFill>
                   <a:srgbClr val="3A7DC9"/>
                 </a:solidFill>
               </a:rPr>
-              <a:t>Rework rate</a:t>
-            </a:r>
-            <a:endParaRPr lang="en-US" sz="1100" dirty="0"/>
-          </a:p>
-        </p:txBody>
-      </p:sp>
-      <p:sp>
-        <p:nvSpPr>
-          <p:cNvPr id="15" name="Text 13"/>
-          <p:cNvSpPr/>
-          <p:nvPr/>
-        </p:nvSpPr>
-        <p:spPr>
-          <a:xfrm>
-            <a:off x="484632" y="4160520"/>
-            <a:ext cx="2368296" cy="548640"/>
+              <a:t>cost_per_task</a:t>
+            </a:r>
+            <a:endParaRPr lang="en-US" sz="1150" dirty="0"/>
+          </a:p>
+        </p:txBody>
+      </p:sp>
+      <p:sp>
+        <p:nvSpPr>
+          <p:cNvPr id="29" name="Shape 27"/>
+          <p:cNvSpPr/>
+          <p:nvPr/>
+        </p:nvSpPr>
+        <p:spPr>
+          <a:xfrm>
+            <a:off x="3017520" y="4114800"/>
+            <a:ext cx="1298448" cy="256032"/>
+          </a:xfrm>
+          <a:prstGeom prst="rect">
+            <a:avLst/>
+          </a:prstGeom>
+          <a:solidFill>
+            <a:srgbClr val="4A7FA8">
+              <a:alpha val="40000"/>
+            </a:srgbClr>
+          </a:solidFill>
+          <a:ln/>
+        </p:spPr>
+      </p:sp>
+      <p:sp>
+        <p:nvSpPr>
+          <p:cNvPr id="30" name="Text 28"/>
+          <p:cNvSpPr/>
+          <p:nvPr/>
+        </p:nvSpPr>
+        <p:spPr>
+          <a:xfrm>
+            <a:off x="3017520" y="4114800"/>
+            <a:ext cx="1298448" cy="256032"/>
+          </a:xfrm>
+          <a:prstGeom prst="rect">
+            <a:avLst/>
+          </a:prstGeom>
+          <a:noFill/>
+          <a:ln/>
+        </p:spPr>
+        <p:txBody>
+          <a:bodyPr wrap="square" lIns="0" tIns="0" rIns="0" bIns="0" rtlCol="0" anchor="ctr"/>
+          <a:lstStyle/>
+          <a:p>
+            <a:pPr algn="ctr" indent="0" marL="0">
+              <a:buNone/>
+            </a:pPr>
+            <a:r>
+              <a:rPr lang="en-US" sz="950" b="1" dirty="0">
+                <a:solidFill>
+                  <a:srgbClr val="FFFFFF"/>
+                </a:solidFill>
+              </a:rPr>
+              <a:t>target: $0.15  ·  7d</a:t>
+            </a:r>
+            <a:endParaRPr lang="en-US" sz="950" dirty="0"/>
+          </a:p>
+        </p:txBody>
+      </p:sp>
+      <p:sp>
+        <p:nvSpPr>
+          <p:cNvPr id="31" name="Text 29"/>
+          <p:cNvSpPr/>
+          <p:nvPr/>
+        </p:nvSpPr>
+        <p:spPr>
+          <a:xfrm>
+            <a:off x="530352" y="4389120"/>
+            <a:ext cx="3749040" cy="256032"/>
           </a:xfrm>
           <a:prstGeom prst="rect">
             <a:avLst/>
@@ -3088,7 +3536,7 @@
                   <a:srgbClr val="D4E4F0"/>
                 </a:solidFill>
               </a:rPr>
-              <a:t>% of agent PRs that required &gt;1 human redirect before merge. Measures spec clarity.</a:t>
+              <a:t>Average token cost per completed coding task</a:t>
             </a:r>
             <a:endParaRPr lang="en-US" sz="1000" dirty="0"/>
           </a:p>
@@ -3096,14 +3544,14 @@
       </p:sp>
       <p:sp>
         <p:nvSpPr>
-          <p:cNvPr id="16" name="Shape 14"/>
-          <p:cNvSpPr/>
-          <p:nvPr/>
-        </p:nvSpPr>
-        <p:spPr>
-          <a:xfrm>
-            <a:off x="3200400" y="1143000"/>
-            <a:ext cx="2697480" cy="3794760"/>
+          <p:cNvPr id="32" name="Shape 30"/>
+          <p:cNvSpPr/>
+          <p:nvPr/>
+        </p:nvSpPr>
+        <p:spPr>
+          <a:xfrm>
+            <a:off x="4663440" y="1115568"/>
+            <a:ext cx="4160520" cy="3767328"/>
           </a:xfrm>
           <a:prstGeom prst="rect">
             <a:avLst/>
@@ -3125,20 +3573,114 @@
       </p:sp>
       <p:sp>
         <p:nvSpPr>
-          <p:cNvPr id="17" name="Shape 15"/>
-          <p:cNvSpPr/>
-          <p:nvPr/>
-        </p:nvSpPr>
-        <p:spPr>
-          <a:xfrm>
-            <a:off x="3200400" y="1143000"/>
-            <a:ext cx="2697480" cy="384048"/>
-          </a:xfrm>
-          <a:prstGeom prst="rect">
-            <a:avLst/>
-          </a:prstGeom>
-          <a:solidFill>
-            <a:srgbClr val="4A7FA8">
+          <p:cNvPr id="33" name="Shape 31"/>
+          <p:cNvSpPr/>
+          <p:nvPr/>
+        </p:nvSpPr>
+        <p:spPr>
+          <a:xfrm>
+            <a:off x="4663440" y="1115568"/>
+            <a:ext cx="4160520" cy="438912"/>
+          </a:xfrm>
+          <a:prstGeom prst="rect">
+            <a:avLst/>
+          </a:prstGeom>
+          <a:solidFill>
+            <a:srgbClr val="3A7DC9">
+              <a:alpha val="95000"/>
+            </a:srgbClr>
+          </a:solidFill>
+          <a:ln/>
+        </p:spPr>
+      </p:sp>
+      <p:sp>
+        <p:nvSpPr>
+          <p:cNvPr id="34" name="Text 32"/>
+          <p:cNvSpPr/>
+          <p:nvPr/>
+        </p:nvSpPr>
+        <p:spPr>
+          <a:xfrm>
+            <a:off x="4663440" y="1115568"/>
+            <a:ext cx="4160520" cy="438912"/>
+          </a:xfrm>
+          <a:prstGeom prst="rect">
+            <a:avLst/>
+          </a:prstGeom>
+          <a:noFill/>
+          <a:ln/>
+        </p:spPr>
+        <p:txBody>
+          <a:bodyPr wrap="square" lIns="0" tIns="0" rIns="0" bIns="0" rtlCol="0" anchor="ctr"/>
+          <a:lstStyle/>
+          <a:p>
+            <a:pPr algn="ctr" indent="0" marL="0">
+              <a:buNone/>
+            </a:pPr>
+            <a:r>
+              <a:rPr lang="en-US" sz="1100" b="1" spc="200" kern="0" dirty="0">
+                <a:solidFill>
+                  <a:srgbClr val="FFFFFF"/>
+                </a:solidFill>
+              </a:rPr>
+              <a:t>PRODUCTION AGENT SLOs</a:t>
+            </a:r>
+            <a:endParaRPr lang="en-US" sz="1100" dirty="0"/>
+          </a:p>
+        </p:txBody>
+      </p:sp>
+      <p:sp>
+        <p:nvSpPr>
+          <p:cNvPr id="35" name="Text 33"/>
+          <p:cNvSpPr/>
+          <p:nvPr/>
+        </p:nvSpPr>
+        <p:spPr>
+          <a:xfrm>
+            <a:off x="4754880" y="1609344"/>
+            <a:ext cx="3977640" cy="237744"/>
+          </a:xfrm>
+          <a:prstGeom prst="rect">
+            <a:avLst/>
+          </a:prstGeom>
+          <a:noFill/>
+          <a:ln/>
+        </p:spPr>
+        <p:txBody>
+          <a:bodyPr wrap="square" lIns="0" tIns="0" rIns="0" bIns="0" rtlCol="0" anchor="ctr"/>
+          <a:lstStyle/>
+          <a:p>
+            <a:pPr indent="0" marL="0">
+              <a:buNone/>
+            </a:pPr>
+            <a:r>
+              <a:rPr lang="en-US" sz="1000" i="1" dirty="0">
+                <a:solidFill>
+                  <a:srgbClr val="5B8DB8"/>
+                </a:solidFill>
+              </a:rPr>
+              <a:t>When your team builds agents that run in production</a:t>
+            </a:r>
+            <a:endParaRPr lang="en-US" sz="1000" dirty="0"/>
+          </a:p>
+        </p:txBody>
+      </p:sp>
+      <p:sp>
+        <p:nvSpPr>
+          <p:cNvPr id="36" name="Shape 34"/>
+          <p:cNvSpPr/>
+          <p:nvPr/>
+        </p:nvSpPr>
+        <p:spPr>
+          <a:xfrm>
+            <a:off x="4754880" y="1920240"/>
+            <a:ext cx="3977640" cy="731520"/>
+          </a:xfrm>
+          <a:prstGeom prst="rect">
+            <a:avLst/>
+          </a:prstGeom>
+          <a:solidFill>
+            <a:srgbClr val="1C3557">
               <a:alpha val="90000"/>
             </a:srgbClr>
           </a:solidFill>
@@ -3147,14 +3689,92 @@
       </p:sp>
       <p:sp>
         <p:nvSpPr>
-          <p:cNvPr id="18" name="Text 16"/>
-          <p:cNvSpPr/>
-          <p:nvPr/>
-        </p:nvSpPr>
-        <p:spPr>
-          <a:xfrm>
-            <a:off x="3200400" y="1143000"/>
-            <a:ext cx="2697480" cy="384048"/>
+          <p:cNvPr id="37" name="Shape 35"/>
+          <p:cNvSpPr/>
+          <p:nvPr/>
+        </p:nvSpPr>
+        <p:spPr>
+          <a:xfrm>
+            <a:off x="4754880" y="1920240"/>
+            <a:ext cx="54864" cy="731520"/>
+          </a:xfrm>
+          <a:prstGeom prst="rect">
+            <a:avLst/>
+          </a:prstGeom>
+          <a:solidFill>
+            <a:srgbClr val="3A7DC9"/>
+          </a:solidFill>
+          <a:ln/>
+        </p:spPr>
+      </p:sp>
+      <p:sp>
+        <p:nvSpPr>
+          <p:cNvPr id="38" name="Text 36"/>
+          <p:cNvSpPr/>
+          <p:nvPr/>
+        </p:nvSpPr>
+        <p:spPr>
+          <a:xfrm>
+            <a:off x="4873752" y="1965960"/>
+            <a:ext cx="2377440" cy="256032"/>
+          </a:xfrm>
+          <a:prstGeom prst="rect">
+            <a:avLst/>
+          </a:prstGeom>
+          <a:noFill/>
+          <a:ln/>
+        </p:spPr>
+        <p:txBody>
+          <a:bodyPr wrap="square" lIns="0" tIns="0" rIns="0" bIns="0" rtlCol="0" anchor="ctr"/>
+          <a:lstStyle/>
+          <a:p>
+            <a:pPr indent="0" marL="0">
+              <a:buNone/>
+            </a:pPr>
+            <a:r>
+              <a:rPr lang="en-US" sz="1150" b="1" dirty="0">
+                <a:solidFill>
+                  <a:srgbClr val="3A7DC9"/>
+                </a:solidFill>
+              </a:rPr>
+              <a:t>task_success_rate</a:t>
+            </a:r>
+            <a:endParaRPr lang="en-US" sz="1150" dirty="0"/>
+          </a:p>
+        </p:txBody>
+      </p:sp>
+      <p:sp>
+        <p:nvSpPr>
+          <p:cNvPr id="39" name="Shape 37"/>
+          <p:cNvSpPr/>
+          <p:nvPr/>
+        </p:nvSpPr>
+        <p:spPr>
+          <a:xfrm>
+            <a:off x="7333488" y="1975104"/>
+            <a:ext cx="1261872" cy="256032"/>
+          </a:xfrm>
+          <a:prstGeom prst="rect">
+            <a:avLst/>
+          </a:prstGeom>
+          <a:solidFill>
+            <a:srgbClr val="3A7DC9">
+              <a:alpha val="40000"/>
+            </a:srgbClr>
+          </a:solidFill>
+          <a:ln/>
+        </p:spPr>
+      </p:sp>
+      <p:sp>
+        <p:nvSpPr>
+          <p:cNvPr id="40" name="Text 38"/>
+          <p:cNvSpPr/>
+          <p:nvPr/>
+        </p:nvSpPr>
+        <p:spPr>
+          <a:xfrm>
+            <a:off x="7333488" y="1975104"/>
+            <a:ext cx="1261872" cy="256032"/>
           </a:xfrm>
           <a:prstGeom prst="rect">
             <a:avLst/>
@@ -3170,83 +3790,27 @@
               <a:buNone/>
             </a:pPr>
             <a:r>
-              <a:rPr lang="en-US" sz="1300" b="1" spc="200" kern="0" dirty="0">
+              <a:rPr lang="en-US" sz="950" b="1" dirty="0">
                 <a:solidFill>
                   <a:srgbClr val="FFFFFF"/>
                 </a:solidFill>
               </a:rPr>
-              <a:t>Velocity</a:t>
-            </a:r>
-            <a:endParaRPr lang="en-US" sz="1300" dirty="0"/>
-          </a:p>
-        </p:txBody>
-      </p:sp>
-      <p:sp>
-        <p:nvSpPr>
-          <p:cNvPr id="19" name="Shape 17"/>
-          <p:cNvSpPr/>
-          <p:nvPr/>
-        </p:nvSpPr>
-        <p:spPr>
-          <a:xfrm>
-            <a:off x="3291840" y="1618488"/>
-            <a:ext cx="2514600" cy="1005840"/>
-          </a:xfrm>
-          <a:prstGeom prst="rect">
-            <a:avLst/>
-          </a:prstGeom>
-          <a:solidFill>
-            <a:srgbClr val="1C3557"/>
-          </a:solidFill>
-          <a:ln/>
-        </p:spPr>
-      </p:sp>
-      <p:sp>
-        <p:nvSpPr>
-          <p:cNvPr id="20" name="Text 18"/>
-          <p:cNvSpPr/>
-          <p:nvPr/>
-        </p:nvSpPr>
-        <p:spPr>
-          <a:xfrm>
-            <a:off x="3364992" y="1673352"/>
-            <a:ext cx="2368296" cy="292608"/>
-          </a:xfrm>
-          <a:prstGeom prst="rect">
-            <a:avLst/>
-          </a:prstGeom>
-          <a:noFill/>
-          <a:ln/>
-        </p:spPr>
-        <p:txBody>
-          <a:bodyPr wrap="square" lIns="0" tIns="0" rIns="0" bIns="0" rtlCol="0" anchor="ctr"/>
-          <a:lstStyle/>
-          <a:p>
-            <a:pPr indent="0" marL="0">
-              <a:buNone/>
-            </a:pPr>
-            <a:r>
-              <a:rPr lang="en-US" sz="1100" b="1" dirty="0">
-                <a:solidFill>
-                  <a:srgbClr val="4A7FA8"/>
-                </a:solidFill>
-              </a:rPr>
-              <a:t>Agent PRs per sprint</a:t>
-            </a:r>
-            <a:endParaRPr lang="en-US" sz="1100" dirty="0"/>
-          </a:p>
-        </p:txBody>
-      </p:sp>
-      <p:sp>
-        <p:nvSpPr>
-          <p:cNvPr id="21" name="Text 19"/>
-          <p:cNvSpPr/>
-          <p:nvPr/>
-        </p:nvSpPr>
-        <p:spPr>
-          <a:xfrm>
-            <a:off x="3364992" y="2002536"/>
-            <a:ext cx="2368296" cy="548640"/>
+              <a:t>target: 95%</a:t>
+            </a:r>
+            <a:endParaRPr lang="en-US" sz="950" dirty="0"/>
+          </a:p>
+        </p:txBody>
+      </p:sp>
+      <p:sp>
+        <p:nvSpPr>
+          <p:cNvPr id="41" name="Text 39"/>
+          <p:cNvSpPr/>
+          <p:nvPr/>
+        </p:nvSpPr>
+        <p:spPr>
+          <a:xfrm>
+            <a:off x="4873752" y="2249424"/>
+            <a:ext cx="3108960" cy="201168"/>
           </a:xfrm>
           <a:prstGeom prst="rect">
             <a:avLst/>
@@ -3267,7 +3831,7 @@
                   <a:srgbClr val="D4E4F0"/>
                 </a:solidFill>
               </a:rPr>
-              <a:t>Volume of agent-generated PRs. Rising = adoption. Flat = bottleneck in review or spec.</a:t>
+              <a:t>% of production agent runs achieving the goal</a:t>
             </a:r>
             <a:endParaRPr lang="en-US" sz="1000" dirty="0"/>
           </a:p>
@@ -3275,233 +3839,56 @@
       </p:sp>
       <p:sp>
         <p:nvSpPr>
-          <p:cNvPr id="22" name="Shape 20"/>
-          <p:cNvSpPr/>
-          <p:nvPr/>
-        </p:nvSpPr>
-        <p:spPr>
-          <a:xfrm>
-            <a:off x="3291840" y="2697480"/>
-            <a:ext cx="2514600" cy="1005840"/>
-          </a:xfrm>
-          <a:prstGeom prst="rect">
-            <a:avLst/>
-          </a:prstGeom>
-          <a:solidFill>
-            <a:srgbClr val="1C3557"/>
-          </a:solidFill>
-          <a:ln/>
-        </p:spPr>
-      </p:sp>
-      <p:sp>
-        <p:nvSpPr>
-          <p:cNvPr id="23" name="Text 21"/>
-          <p:cNvSpPr/>
-          <p:nvPr/>
-        </p:nvSpPr>
-        <p:spPr>
-          <a:xfrm>
-            <a:off x="3364992" y="2752344"/>
-            <a:ext cx="2368296" cy="292608"/>
-          </a:xfrm>
-          <a:prstGeom prst="rect">
-            <a:avLst/>
-          </a:prstGeom>
-          <a:noFill/>
-          <a:ln/>
-        </p:spPr>
-        <p:txBody>
-          <a:bodyPr wrap="square" lIns="0" tIns="0" rIns="0" bIns="0" rtlCol="0" anchor="ctr"/>
-          <a:lstStyle/>
-          <a:p>
-            <a:pPr indent="0" marL="0">
-              <a:buNone/>
-            </a:pPr>
-            <a:r>
-              <a:rPr lang="en-US" sz="1100" b="1" dirty="0">
-                <a:solidFill>
-                  <a:srgbClr val="4A7FA8"/>
-                </a:solidFill>
-              </a:rPr>
-              <a:t>Time to HITL approval</a:t>
-            </a:r>
-            <a:endParaRPr lang="en-US" sz="1100" dirty="0"/>
-          </a:p>
-        </p:txBody>
-      </p:sp>
-      <p:sp>
-        <p:nvSpPr>
-          <p:cNvPr id="24" name="Text 22"/>
-          <p:cNvSpPr/>
-          <p:nvPr/>
-        </p:nvSpPr>
-        <p:spPr>
-          <a:xfrm>
-            <a:off x="3364992" y="3081528"/>
-            <a:ext cx="2368296" cy="548640"/>
-          </a:xfrm>
-          <a:prstGeom prst="rect">
-            <a:avLst/>
-          </a:prstGeom>
-          <a:noFill/>
-          <a:ln/>
-        </p:spPr>
-        <p:txBody>
-          <a:bodyPr wrap="square" lIns="0" tIns="0" rIns="0" bIns="0" rtlCol="0" anchor="ctr"/>
-          <a:lstStyle/>
-          <a:p>
-            <a:pPr indent="0" marL="0">
-              <a:buNone/>
-            </a:pPr>
-            <a:r>
-              <a:rPr lang="en-US" sz="1000" dirty="0">
-                <a:solidFill>
-                  <a:srgbClr val="D4E4F0"/>
-                </a:solidFill>
-              </a:rPr>
-              <a:t>How long humans take to review agent output. Rising = too many PRs or too-complex diffs.</a:t>
-            </a:r>
-            <a:endParaRPr lang="en-US" sz="1000" dirty="0"/>
-          </a:p>
-        </p:txBody>
-      </p:sp>
-      <p:sp>
-        <p:nvSpPr>
-          <p:cNvPr id="25" name="Shape 23"/>
-          <p:cNvSpPr/>
-          <p:nvPr/>
-        </p:nvSpPr>
-        <p:spPr>
-          <a:xfrm>
-            <a:off x="3291840" y="3776472"/>
-            <a:ext cx="2514600" cy="1005840"/>
-          </a:xfrm>
-          <a:prstGeom prst="rect">
-            <a:avLst/>
-          </a:prstGeom>
-          <a:solidFill>
-            <a:srgbClr val="1C3557"/>
-          </a:solidFill>
-          <a:ln/>
-        </p:spPr>
-      </p:sp>
-      <p:sp>
-        <p:nvSpPr>
-          <p:cNvPr id="26" name="Text 24"/>
-          <p:cNvSpPr/>
-          <p:nvPr/>
-        </p:nvSpPr>
-        <p:spPr>
-          <a:xfrm>
-            <a:off x="3364992" y="3831336"/>
-            <a:ext cx="2368296" cy="292608"/>
-          </a:xfrm>
-          <a:prstGeom prst="rect">
-            <a:avLst/>
-          </a:prstGeom>
-          <a:noFill/>
-          <a:ln/>
-        </p:spPr>
-        <p:txBody>
-          <a:bodyPr wrap="square" lIns="0" tIns="0" rIns="0" bIns="0" rtlCol="0" anchor="ctr"/>
-          <a:lstStyle/>
-          <a:p>
-            <a:pPr indent="0" marL="0">
-              <a:buNone/>
-            </a:pPr>
-            <a:r>
-              <a:rPr lang="en-US" sz="1100" b="1" dirty="0">
-                <a:solidFill>
-                  <a:srgbClr val="4A7FA8"/>
-                </a:solidFill>
-              </a:rPr>
-              <a:t>Spec-to-merge cycle time</a:t>
-            </a:r>
-            <a:endParaRPr lang="en-US" sz="1100" dirty="0"/>
-          </a:p>
-        </p:txBody>
-      </p:sp>
-      <p:sp>
-        <p:nvSpPr>
-          <p:cNvPr id="27" name="Text 25"/>
-          <p:cNvSpPr/>
-          <p:nvPr/>
-        </p:nvSpPr>
-        <p:spPr>
-          <a:xfrm>
-            <a:off x="3364992" y="4160520"/>
-            <a:ext cx="2368296" cy="548640"/>
-          </a:xfrm>
-          <a:prstGeom prst="rect">
-            <a:avLst/>
-          </a:prstGeom>
-          <a:noFill/>
-          <a:ln/>
-        </p:spPr>
-        <p:txBody>
-          <a:bodyPr wrap="square" lIns="0" tIns="0" rIns="0" bIns="0" rtlCol="0" anchor="ctr"/>
-          <a:lstStyle/>
-          <a:p>
-            <a:pPr indent="0" marL="0">
-              <a:buNone/>
-            </a:pPr>
-            <a:r>
-              <a:rPr lang="en-US" sz="1000" dirty="0">
-                <a:solidFill>
-                  <a:srgbClr val="D4E4F0"/>
-                </a:solidFill>
-              </a:rPr>
-              <a:t>From requirements.md to merged PR. Measures end-to-end SDD efficiency.</a:t>
-            </a:r>
-            <a:endParaRPr lang="en-US" sz="1000" dirty="0"/>
-          </a:p>
-        </p:txBody>
-      </p:sp>
-      <p:sp>
-        <p:nvSpPr>
-          <p:cNvPr id="28" name="Shape 26"/>
-          <p:cNvSpPr/>
-          <p:nvPr/>
-        </p:nvSpPr>
-        <p:spPr>
-          <a:xfrm>
-            <a:off x="6080760" y="1143000"/>
-            <a:ext cx="2697480" cy="3794760"/>
-          </a:xfrm>
-          <a:prstGeom prst="rect">
-            <a:avLst/>
-          </a:prstGeom>
-          <a:solidFill>
-            <a:srgbClr val="2E5073">
-              <a:alpha val="82000"/>
-            </a:srgbClr>
-          </a:solidFill>
-          <a:ln/>
-          <a:effectLst>
-            <a:outerShdw sx="100000" sy="100000" kx="0" ky="0" algn="bl" rotWithShape="0" blurRad="101600" dist="38100" dir="8100000">
-              <a:srgbClr val="000000">
-                <a:alpha val="13000"/>
-              </a:srgbClr>
-            </a:outerShdw>
-          </a:effectLst>
-        </p:spPr>
-      </p:sp>
-      <p:sp>
-        <p:nvSpPr>
-          <p:cNvPr id="29" name="Shape 27"/>
-          <p:cNvSpPr/>
-          <p:nvPr/>
-        </p:nvSpPr>
-        <p:spPr>
-          <a:xfrm>
-            <a:off x="6080760" y="1143000"/>
-            <a:ext cx="2697480" cy="384048"/>
-          </a:xfrm>
-          <a:prstGeom prst="rect">
-            <a:avLst/>
-          </a:prstGeom>
-          <a:solidFill>
-            <a:srgbClr val="3A7E6E">
+          <p:cNvPr id="42" name="Text 40"/>
+          <p:cNvSpPr/>
+          <p:nvPr/>
+        </p:nvSpPr>
+        <p:spPr>
+          <a:xfrm>
+            <a:off x="4873752" y="2432304"/>
+            <a:ext cx="3108960" cy="182880"/>
+          </a:xfrm>
+          <a:prstGeom prst="rect">
+            <a:avLst/>
+          </a:prstGeom>
+          <a:noFill/>
+          <a:ln/>
+        </p:spPr>
+        <p:txBody>
+          <a:bodyPr wrap="square" lIns="0" tIns="0" rIns="0" bIns="0" rtlCol="0" anchor="ctr"/>
+          <a:lstStyle/>
+          <a:p>
+            <a:pPr indent="0" marL="0">
+              <a:buNone/>
+            </a:pPr>
+            <a:r>
+              <a:rPr lang="en-US" sz="950" dirty="0">
+                <a:solidFill>
+                  <a:srgbClr val="8096B0"/>
+                </a:solidFill>
+              </a:rPr>
+              <a:t>⚠ alert: 90%  ·  7d window</a:t>
+            </a:r>
+            <a:endParaRPr lang="en-US" sz="950" dirty="0"/>
+          </a:p>
+        </p:txBody>
+      </p:sp>
+      <p:sp>
+        <p:nvSpPr>
+          <p:cNvPr id="43" name="Shape 41"/>
+          <p:cNvSpPr/>
+          <p:nvPr/>
+        </p:nvSpPr>
+        <p:spPr>
+          <a:xfrm>
+            <a:off x="4754880" y="2724912"/>
+            <a:ext cx="3977640" cy="731520"/>
+          </a:xfrm>
+          <a:prstGeom prst="rect">
+            <a:avLst/>
+          </a:prstGeom>
+          <a:solidFill>
+            <a:srgbClr val="1C3557">
               <a:alpha val="90000"/>
             </a:srgbClr>
           </a:solidFill>
@@ -3510,14 +3897,92 @@
       </p:sp>
       <p:sp>
         <p:nvSpPr>
-          <p:cNvPr id="30" name="Text 28"/>
-          <p:cNvSpPr/>
-          <p:nvPr/>
-        </p:nvSpPr>
-        <p:spPr>
-          <a:xfrm>
-            <a:off x="6080760" y="1143000"/>
-            <a:ext cx="2697480" cy="384048"/>
+          <p:cNvPr id="44" name="Shape 42"/>
+          <p:cNvSpPr/>
+          <p:nvPr/>
+        </p:nvSpPr>
+        <p:spPr>
+          <a:xfrm>
+            <a:off x="4754880" y="2724912"/>
+            <a:ext cx="54864" cy="731520"/>
+          </a:xfrm>
+          <a:prstGeom prst="rect">
+            <a:avLst/>
+          </a:prstGeom>
+          <a:solidFill>
+            <a:srgbClr val="3A7DC9"/>
+          </a:solidFill>
+          <a:ln/>
+        </p:spPr>
+      </p:sp>
+      <p:sp>
+        <p:nvSpPr>
+          <p:cNvPr id="45" name="Text 43"/>
+          <p:cNvSpPr/>
+          <p:nvPr/>
+        </p:nvSpPr>
+        <p:spPr>
+          <a:xfrm>
+            <a:off x="4873752" y="2770632"/>
+            <a:ext cx="2377440" cy="256032"/>
+          </a:xfrm>
+          <a:prstGeom prst="rect">
+            <a:avLst/>
+          </a:prstGeom>
+          <a:noFill/>
+          <a:ln/>
+        </p:spPr>
+        <p:txBody>
+          <a:bodyPr wrap="square" lIns="0" tIns="0" rIns="0" bIns="0" rtlCol="0" anchor="ctr"/>
+          <a:lstStyle/>
+          <a:p>
+            <a:pPr indent="0" marL="0">
+              <a:buNone/>
+            </a:pPr>
+            <a:r>
+              <a:rPr lang="en-US" sz="1150" b="1" dirty="0">
+                <a:solidFill>
+                  <a:srgbClr val="3A7DC9"/>
+                </a:solidFill>
+              </a:rPr>
+              <a:t>task_completion_time_p95</a:t>
+            </a:r>
+            <a:endParaRPr lang="en-US" sz="1150" dirty="0"/>
+          </a:p>
+        </p:txBody>
+      </p:sp>
+      <p:sp>
+        <p:nvSpPr>
+          <p:cNvPr id="46" name="Shape 44"/>
+          <p:cNvSpPr/>
+          <p:nvPr/>
+        </p:nvSpPr>
+        <p:spPr>
+          <a:xfrm>
+            <a:off x="7333488" y="2779776"/>
+            <a:ext cx="1261872" cy="256032"/>
+          </a:xfrm>
+          <a:prstGeom prst="rect">
+            <a:avLst/>
+          </a:prstGeom>
+          <a:solidFill>
+            <a:srgbClr val="3A7DC9">
+              <a:alpha val="40000"/>
+            </a:srgbClr>
+          </a:solidFill>
+          <a:ln/>
+        </p:spPr>
+      </p:sp>
+      <p:sp>
+        <p:nvSpPr>
+          <p:cNvPr id="47" name="Text 45"/>
+          <p:cNvSpPr/>
+          <p:nvPr/>
+        </p:nvSpPr>
+        <p:spPr>
+          <a:xfrm>
+            <a:off x="7333488" y="2779776"/>
+            <a:ext cx="1261872" cy="256032"/>
           </a:xfrm>
           <a:prstGeom prst="rect">
             <a:avLst/>
@@ -3533,83 +3998,27 @@
               <a:buNone/>
             </a:pPr>
             <a:r>
-              <a:rPr lang="en-US" sz="1300" b="1" spc="200" kern="0" dirty="0">
+              <a:rPr lang="en-US" sz="950" b="1" dirty="0">
                 <a:solidFill>
                   <a:srgbClr val="FFFFFF"/>
                 </a:solidFill>
               </a:rPr>
-              <a:t>Hygiene</a:t>
-            </a:r>
-            <a:endParaRPr lang="en-US" sz="1300" dirty="0"/>
-          </a:p>
-        </p:txBody>
-      </p:sp>
-      <p:sp>
-        <p:nvSpPr>
-          <p:cNvPr id="31" name="Shape 29"/>
-          <p:cNvSpPr/>
-          <p:nvPr/>
-        </p:nvSpPr>
-        <p:spPr>
-          <a:xfrm>
-            <a:off x="6172200" y="1618488"/>
-            <a:ext cx="2514600" cy="1005840"/>
-          </a:xfrm>
-          <a:prstGeom prst="rect">
-            <a:avLst/>
-          </a:prstGeom>
-          <a:solidFill>
-            <a:srgbClr val="1C3557"/>
-          </a:solidFill>
-          <a:ln/>
-        </p:spPr>
-      </p:sp>
-      <p:sp>
-        <p:nvSpPr>
-          <p:cNvPr id="32" name="Text 30"/>
-          <p:cNvSpPr/>
-          <p:nvPr/>
-        </p:nvSpPr>
-        <p:spPr>
-          <a:xfrm>
-            <a:off x="6245352" y="1673352"/>
-            <a:ext cx="2368296" cy="292608"/>
-          </a:xfrm>
-          <a:prstGeom prst="rect">
-            <a:avLst/>
-          </a:prstGeom>
-          <a:noFill/>
-          <a:ln/>
-        </p:spPr>
-        <p:txBody>
-          <a:bodyPr wrap="square" lIns="0" tIns="0" rIns="0" bIns="0" rtlCol="0" anchor="ctr"/>
-          <a:lstStyle/>
-          <a:p>
-            <a:pPr indent="0" marL="0">
-              <a:buNone/>
-            </a:pPr>
-            <a:r>
-              <a:rPr lang="en-US" sz="1100" b="1" dirty="0">
-                <a:solidFill>
-                  <a:srgbClr val="3A7E6E"/>
-                </a:solidFill>
-              </a:rPr>
-              <a:t>ADR creation rate</a:t>
-            </a:r>
-            <a:endParaRPr lang="en-US" sz="1100" dirty="0"/>
-          </a:p>
-        </p:txBody>
-      </p:sp>
-      <p:sp>
-        <p:nvSpPr>
-          <p:cNvPr id="33" name="Text 31"/>
-          <p:cNvSpPr/>
-          <p:nvPr/>
-        </p:nvSpPr>
-        <p:spPr>
-          <a:xfrm>
-            <a:off x="6245352" y="2002536"/>
-            <a:ext cx="2368296" cy="548640"/>
+              <a:t>target: 120s</a:t>
+            </a:r>
+            <a:endParaRPr lang="en-US" sz="950" dirty="0"/>
+          </a:p>
+        </p:txBody>
+      </p:sp>
+      <p:sp>
+        <p:nvSpPr>
+          <p:cNvPr id="48" name="Text 46"/>
+          <p:cNvSpPr/>
+          <p:nvPr/>
+        </p:nvSpPr>
+        <p:spPr>
+          <a:xfrm>
+            <a:off x="4873752" y="3054096"/>
+            <a:ext cx="3108960" cy="201168"/>
           </a:xfrm>
           <a:prstGeom prst="rect">
             <a:avLst/>
@@ -3630,7 +4039,7 @@
                   <a:srgbClr val="D4E4F0"/>
                 </a:solidFill>
               </a:rPr>
-              <a:t>ADRs per sprint. Measures whether architectural decisions are being captured continuously.</a:t>
+              <a:t>p95 latency for task completion</a:t>
             </a:r>
             <a:endParaRPr lang="en-US" sz="1000" dirty="0"/>
           </a:p>
@@ -3638,70 +4047,186 @@
       </p:sp>
       <p:sp>
         <p:nvSpPr>
-          <p:cNvPr id="34" name="Shape 32"/>
-          <p:cNvSpPr/>
-          <p:nvPr/>
-        </p:nvSpPr>
-        <p:spPr>
-          <a:xfrm>
-            <a:off x="6172200" y="2697480"/>
-            <a:ext cx="2514600" cy="1005840"/>
-          </a:xfrm>
-          <a:prstGeom prst="rect">
-            <a:avLst/>
-          </a:prstGeom>
-          <a:solidFill>
-            <a:srgbClr val="1C3557"/>
-          </a:solidFill>
-          <a:ln/>
-        </p:spPr>
-      </p:sp>
-      <p:sp>
-        <p:nvSpPr>
-          <p:cNvPr id="35" name="Text 33"/>
-          <p:cNvSpPr/>
-          <p:nvPr/>
-        </p:nvSpPr>
-        <p:spPr>
-          <a:xfrm>
-            <a:off x="6245352" y="2752344"/>
-            <a:ext cx="2368296" cy="292608"/>
-          </a:xfrm>
-          <a:prstGeom prst="rect">
-            <a:avLst/>
-          </a:prstGeom>
-          <a:noFill/>
-          <a:ln/>
-        </p:spPr>
-        <p:txBody>
-          <a:bodyPr wrap="square" lIns="0" tIns="0" rIns="0" bIns="0" rtlCol="0" anchor="ctr"/>
-          <a:lstStyle/>
-          <a:p>
-            <a:pPr indent="0" marL="0">
-              <a:buNone/>
-            </a:pPr>
-            <a:r>
-              <a:rPr lang="en-US" sz="1100" b="1" dirty="0">
-                <a:solidFill>
-                  <a:srgbClr val="3A7E6E"/>
-                </a:solidFill>
-              </a:rPr>
-              <a:t>SPEC.md staleness</a:t>
-            </a:r>
-            <a:endParaRPr lang="en-US" sz="1100" dirty="0"/>
-          </a:p>
-        </p:txBody>
-      </p:sp>
-      <p:sp>
-        <p:nvSpPr>
-          <p:cNvPr id="36" name="Text 34"/>
-          <p:cNvSpPr/>
-          <p:nvPr/>
-        </p:nvSpPr>
-        <p:spPr>
-          <a:xfrm>
-            <a:off x="6245352" y="3081528"/>
-            <a:ext cx="2368296" cy="548640"/>
+          <p:cNvPr id="49" name="Text 47"/>
+          <p:cNvSpPr/>
+          <p:nvPr/>
+        </p:nvSpPr>
+        <p:spPr>
+          <a:xfrm>
+            <a:off x="4873752" y="3236976"/>
+            <a:ext cx="3108960" cy="182880"/>
+          </a:xfrm>
+          <a:prstGeom prst="rect">
+            <a:avLst/>
+          </a:prstGeom>
+          <a:noFill/>
+          <a:ln/>
+        </p:spPr>
+        <p:txBody>
+          <a:bodyPr wrap="square" lIns="0" tIns="0" rIns="0" bIns="0" rtlCol="0" anchor="ctr"/>
+          <a:lstStyle/>
+          <a:p>
+            <a:pPr indent="0" marL="0">
+              <a:buNone/>
+            </a:pPr>
+            <a:r>
+              <a:rPr lang="en-US" sz="950" dirty="0">
+                <a:solidFill>
+                  <a:srgbClr val="8096B0"/>
+                </a:solidFill>
+              </a:rPr>
+              <a:t>⚠ alert: 180s  ·  1d window</a:t>
+            </a:r>
+            <a:endParaRPr lang="en-US" sz="950" dirty="0"/>
+          </a:p>
+        </p:txBody>
+      </p:sp>
+      <p:sp>
+        <p:nvSpPr>
+          <p:cNvPr id="50" name="Shape 48"/>
+          <p:cNvSpPr/>
+          <p:nvPr/>
+        </p:nvSpPr>
+        <p:spPr>
+          <a:xfrm>
+            <a:off x="4754880" y="3529584"/>
+            <a:ext cx="3977640" cy="731520"/>
+          </a:xfrm>
+          <a:prstGeom prst="rect">
+            <a:avLst/>
+          </a:prstGeom>
+          <a:solidFill>
+            <a:srgbClr val="1C3557">
+              <a:alpha val="90000"/>
+            </a:srgbClr>
+          </a:solidFill>
+          <a:ln/>
+        </p:spPr>
+      </p:sp>
+      <p:sp>
+        <p:nvSpPr>
+          <p:cNvPr id="51" name="Shape 49"/>
+          <p:cNvSpPr/>
+          <p:nvPr/>
+        </p:nvSpPr>
+        <p:spPr>
+          <a:xfrm>
+            <a:off x="4754880" y="3529584"/>
+            <a:ext cx="54864" cy="731520"/>
+          </a:xfrm>
+          <a:prstGeom prst="rect">
+            <a:avLst/>
+          </a:prstGeom>
+          <a:solidFill>
+            <a:srgbClr val="3A7DC9"/>
+          </a:solidFill>
+          <a:ln/>
+        </p:spPr>
+      </p:sp>
+      <p:sp>
+        <p:nvSpPr>
+          <p:cNvPr id="52" name="Text 50"/>
+          <p:cNvSpPr/>
+          <p:nvPr/>
+        </p:nvSpPr>
+        <p:spPr>
+          <a:xfrm>
+            <a:off x="4873752" y="3575304"/>
+            <a:ext cx="2377440" cy="256032"/>
+          </a:xfrm>
+          <a:prstGeom prst="rect">
+            <a:avLst/>
+          </a:prstGeom>
+          <a:noFill/>
+          <a:ln/>
+        </p:spPr>
+        <p:txBody>
+          <a:bodyPr wrap="square" lIns="0" tIns="0" rIns="0" bIns="0" rtlCol="0" anchor="ctr"/>
+          <a:lstStyle/>
+          <a:p>
+            <a:pPr indent="0" marL="0">
+              <a:buNone/>
+            </a:pPr>
+            <a:r>
+              <a:rPr lang="en-US" sz="1150" b="1" dirty="0">
+                <a:solidFill>
+                  <a:srgbClr val="3A7DC9"/>
+                </a:solidFill>
+              </a:rPr>
+              <a:t>human_escalation_rate</a:t>
+            </a:r>
+            <a:endParaRPr lang="en-US" sz="1150" dirty="0"/>
+          </a:p>
+        </p:txBody>
+      </p:sp>
+      <p:sp>
+        <p:nvSpPr>
+          <p:cNvPr id="53" name="Shape 51"/>
+          <p:cNvSpPr/>
+          <p:nvPr/>
+        </p:nvSpPr>
+        <p:spPr>
+          <a:xfrm>
+            <a:off x="7333488" y="3584448"/>
+            <a:ext cx="1261872" cy="256032"/>
+          </a:xfrm>
+          <a:prstGeom prst="rect">
+            <a:avLst/>
+          </a:prstGeom>
+          <a:solidFill>
+            <a:srgbClr val="3A7DC9">
+              <a:alpha val="40000"/>
+            </a:srgbClr>
+          </a:solidFill>
+          <a:ln/>
+        </p:spPr>
+      </p:sp>
+      <p:sp>
+        <p:nvSpPr>
+          <p:cNvPr id="54" name="Text 52"/>
+          <p:cNvSpPr/>
+          <p:nvPr/>
+        </p:nvSpPr>
+        <p:spPr>
+          <a:xfrm>
+            <a:off x="7333488" y="3584448"/>
+            <a:ext cx="1261872" cy="256032"/>
+          </a:xfrm>
+          <a:prstGeom prst="rect">
+            <a:avLst/>
+          </a:prstGeom>
+          <a:noFill/>
+          <a:ln/>
+        </p:spPr>
+        <p:txBody>
+          <a:bodyPr wrap="square" lIns="0" tIns="0" rIns="0" bIns="0" rtlCol="0" anchor="ctr"/>
+          <a:lstStyle/>
+          <a:p>
+            <a:pPr algn="ctr" indent="0" marL="0">
+              <a:buNone/>
+            </a:pPr>
+            <a:r>
+              <a:rPr lang="en-US" sz="950" b="1" dirty="0">
+                <a:solidFill>
+                  <a:srgbClr val="FFFFFF"/>
+                </a:solidFill>
+              </a:rPr>
+              <a:t>target: &lt;5%</a:t>
+            </a:r>
+            <a:endParaRPr lang="en-US" sz="950" dirty="0"/>
+          </a:p>
+        </p:txBody>
+      </p:sp>
+      <p:sp>
+        <p:nvSpPr>
+          <p:cNvPr id="55" name="Text 53"/>
+          <p:cNvSpPr/>
+          <p:nvPr/>
+        </p:nvSpPr>
+        <p:spPr>
+          <a:xfrm>
+            <a:off x="4873752" y="3858768"/>
+            <a:ext cx="3108960" cy="201168"/>
           </a:xfrm>
           <a:prstGeom prst="rect">
             <a:avLst/>
@@ -3722,7 +4247,7 @@
                   <a:srgbClr val="D4E4F0"/>
                 </a:solidFill>
               </a:rPr>
-              <a:t>Days since last SPEC.md update. Rising = spec and reality diverging.</a:t>
+              <a:t>% of runs where HITL is triggered</a:t>
             </a:r>
             <a:endParaRPr lang="en-US" sz="1000" dirty="0"/>
           </a:p>
@@ -3730,93 +4255,73 @@
       </p:sp>
       <p:sp>
         <p:nvSpPr>
-          <p:cNvPr id="37" name="Shape 35"/>
-          <p:cNvSpPr/>
-          <p:nvPr/>
-        </p:nvSpPr>
-        <p:spPr>
-          <a:xfrm>
-            <a:off x="6172200" y="3776472"/>
-            <a:ext cx="2514600" cy="1005840"/>
-          </a:xfrm>
-          <a:prstGeom prst="rect">
-            <a:avLst/>
-          </a:prstGeom>
-          <a:solidFill>
-            <a:srgbClr val="1C3557"/>
-          </a:solidFill>
-          <a:ln/>
-        </p:spPr>
-      </p:sp>
-      <p:sp>
-        <p:nvSpPr>
-          <p:cNvPr id="38" name="Text 36"/>
-          <p:cNvSpPr/>
-          <p:nvPr/>
-        </p:nvSpPr>
-        <p:spPr>
-          <a:xfrm>
-            <a:off x="6245352" y="3831336"/>
-            <a:ext cx="2368296" cy="292608"/>
-          </a:xfrm>
-          <a:prstGeom prst="rect">
-            <a:avLst/>
-          </a:prstGeom>
-          <a:noFill/>
-          <a:ln/>
-        </p:spPr>
-        <p:txBody>
-          <a:bodyPr wrap="square" lIns="0" tIns="0" rIns="0" bIns="0" rtlCol="0" anchor="ctr"/>
-          <a:lstStyle/>
-          <a:p>
-            <a:pPr indent="0" marL="0">
-              <a:buNone/>
-            </a:pPr>
-            <a:r>
-              <a:rPr lang="en-US" sz="1100" b="1" dirty="0">
-                <a:solidFill>
-                  <a:srgbClr val="3A7E6E"/>
-                </a:solidFill>
-              </a:rPr>
-              <a:t>CLAUDE.md line count</a:t>
-            </a:r>
-            <a:endParaRPr lang="en-US" sz="1100" dirty="0"/>
-          </a:p>
-        </p:txBody>
-      </p:sp>
-      <p:sp>
-        <p:nvSpPr>
-          <p:cNvPr id="39" name="Text 37"/>
-          <p:cNvSpPr/>
-          <p:nvPr/>
-        </p:nvSpPr>
-        <p:spPr>
-          <a:xfrm>
-            <a:off x="6245352" y="4160520"/>
-            <a:ext cx="2368296" cy="548640"/>
-          </a:xfrm>
-          <a:prstGeom prst="rect">
-            <a:avLst/>
-          </a:prstGeom>
-          <a:noFill/>
-          <a:ln/>
-        </p:spPr>
-        <p:txBody>
-          <a:bodyPr wrap="square" lIns="0" tIns="0" rIns="0" bIns="0" rtlCol="0" anchor="ctr"/>
-          <a:lstStyle/>
-          <a:p>
-            <a:pPr indent="0" marL="0">
-              <a:buNone/>
-            </a:pPr>
-            <a:r>
-              <a:rPr lang="en-US" sz="1000" dirty="0">
-                <a:solidFill>
-                  <a:srgbClr val="D4E4F0"/>
-                </a:solidFill>
-              </a:rPr>
-              <a:t>Lines in CLAUDE.md. Rising = bloat. Should stay under 300.</a:t>
-            </a:r>
-            <a:endParaRPr lang="en-US" sz="1000" dirty="0"/>
+          <p:cNvPr id="56" name="Text 54"/>
+          <p:cNvSpPr/>
+          <p:nvPr/>
+        </p:nvSpPr>
+        <p:spPr>
+          <a:xfrm>
+            <a:off x="4873752" y="4041648"/>
+            <a:ext cx="3108960" cy="182880"/>
+          </a:xfrm>
+          <a:prstGeom prst="rect">
+            <a:avLst/>
+          </a:prstGeom>
+          <a:noFill/>
+          <a:ln/>
+        </p:spPr>
+        <p:txBody>
+          <a:bodyPr wrap="square" lIns="0" tIns="0" rIns="0" bIns="0" rtlCol="0" anchor="ctr"/>
+          <a:lstStyle/>
+          <a:p>
+            <a:pPr indent="0" marL="0">
+              <a:buNone/>
+            </a:pPr>
+            <a:r>
+              <a:rPr lang="en-US" sz="950" dirty="0">
+                <a:solidFill>
+                  <a:srgbClr val="8096B0"/>
+                </a:solidFill>
+              </a:rPr>
+              <a:t>⚠ alert: 15%  ·  7d window</a:t>
+            </a:r>
+            <a:endParaRPr lang="en-US" sz="950" dirty="0"/>
+          </a:p>
+        </p:txBody>
+      </p:sp>
+      <p:sp>
+        <p:nvSpPr>
+          <p:cNvPr id="57" name="Text 55"/>
+          <p:cNvSpPr/>
+          <p:nvPr/>
+        </p:nvSpPr>
+        <p:spPr>
+          <a:xfrm>
+            <a:off x="320040" y="4919472"/>
+            <a:ext cx="8503920" cy="201168"/>
+          </a:xfrm>
+          <a:prstGeom prst="rect">
+            <a:avLst/>
+          </a:prstGeom>
+          <a:noFill/>
+          <a:ln/>
+        </p:spPr>
+        <p:txBody>
+          <a:bodyPr wrap="square" lIns="0" tIns="0" rIns="0" bIns="0" rtlCol="0" anchor="ctr"/>
+          <a:lstStyle/>
+          <a:p>
+            <a:pPr indent="0" marL="0">
+              <a:buNone/>
+            </a:pPr>
+            <a:r>
+              <a:rPr lang="en-US" sz="1050" i="1" dirty="0">
+                <a:solidFill>
+                  <a:srgbClr val="7A90A8"/>
+                </a:solidFill>
+              </a:rPr>
+              <a:t>Start with coding-agent SLOs on day one. Add production SLOs when your team ships agents to end users.</a:t>
+            </a:r>
+            <a:endParaRPr lang="en-US" sz="1050" dirty="0"/>
           </a:p>
         </p:txBody>
       </p:sp>
@@ -3916,8 +4421,8 @@
         </p:nvSpPr>
         <p:spPr>
           <a:xfrm>
-            <a:off x="365760" y="868680"/>
-            <a:ext cx="8412480" cy="420624"/>
+            <a:off x="365760" y="841248"/>
+            <a:ext cx="8412480" cy="384048"/>
           </a:xfrm>
           <a:prstGeom prst="rect">
             <a:avLst/>
@@ -3938,7 +4443,7 @@
                   <a:srgbClr val="1C3557"/>
                 </a:solidFill>
               </a:rPr>
-              <a:t>Design Your Team’s Review System for an Agentic Pipeline</a:t>
+              <a:t>Claude Code Workflow Security &amp; Observability Audit</a:t>
             </a:r>
             <a:endParaRPr lang="en-US" sz="1900" dirty="0"/>
           </a:p>
@@ -3952,8 +4457,64 @@
         </p:nvSpPr>
         <p:spPr>
           <a:xfrm>
-            <a:off x="320040" y="1389888"/>
-            <a:ext cx="8503920" cy="795528"/>
+            <a:off x="320040" y="1280160"/>
+            <a:ext cx="8503920" cy="237744"/>
+          </a:xfrm>
+          <a:prstGeom prst="rect">
+            <a:avLst/>
+          </a:prstGeom>
+          <a:solidFill>
+            <a:srgbClr val="D4E4F0"/>
+          </a:solidFill>
+          <a:ln/>
+        </p:spPr>
+      </p:sp>
+      <p:sp>
+        <p:nvSpPr>
+          <p:cNvPr id="6" name="Text 4"/>
+          <p:cNvSpPr/>
+          <p:nvPr/>
+        </p:nvSpPr>
+        <p:spPr>
+          <a:xfrm>
+            <a:off x="411480" y="1280160"/>
+            <a:ext cx="8321040" cy="237744"/>
+          </a:xfrm>
+          <a:prstGeom prst="rect">
+            <a:avLst/>
+          </a:prstGeom>
+          <a:noFill/>
+          <a:ln/>
+        </p:spPr>
+        <p:txBody>
+          <a:bodyPr wrap="square" lIns="0" tIns="0" rIns="0" bIns="0" rtlCol="0" anchor="ctr"/>
+          <a:lstStyle/>
+          <a:p>
+            <a:pPr indent="0" marL="0">
+              <a:buNone/>
+            </a:pPr>
+            <a:r>
+              <a:rPr lang="en-US" sz="1000" i="1" dirty="0">
+                <a:solidFill>
+                  <a:srgbClr val="1C3557"/>
+                </a:solidFill>
+              </a:rPr>
+              <a:t>Scope: audit a Claude Code workflow your team is using or plans to use (e.g. agent-driven feature development, automated refactoring, nightly hygiene tasks)</a:t>
+            </a:r>
+            <a:endParaRPr lang="en-US" sz="1000" dirty="0"/>
+          </a:p>
+        </p:txBody>
+      </p:sp>
+      <p:sp>
+        <p:nvSpPr>
+          <p:cNvPr id="7" name="Shape 5"/>
+          <p:cNvSpPr/>
+          <p:nvPr/>
+        </p:nvSpPr>
+        <p:spPr>
+          <a:xfrm>
+            <a:off x="320040" y="1591056"/>
+            <a:ext cx="8503920" cy="749808"/>
           </a:xfrm>
           <a:prstGeom prst="rect">
             <a:avLst/>
@@ -3973,14 +4534,14 @@
       </p:sp>
       <p:sp>
         <p:nvSpPr>
-          <p:cNvPr id="6" name="Shape 4"/>
-          <p:cNvSpPr/>
-          <p:nvPr/>
-        </p:nvSpPr>
-        <p:spPr>
-          <a:xfrm>
-            <a:off x="320040" y="1389888"/>
-            <a:ext cx="475488" cy="795528"/>
+          <p:cNvPr id="8" name="Shape 6"/>
+          <p:cNvSpPr/>
+          <p:nvPr/>
+        </p:nvSpPr>
+        <p:spPr>
+          <a:xfrm>
+            <a:off x="320040" y="1591056"/>
+            <a:ext cx="475488" cy="749808"/>
           </a:xfrm>
           <a:prstGeom prst="rect">
             <a:avLst/>
@@ -3993,14 +4554,14 @@
       </p:sp>
       <p:sp>
         <p:nvSpPr>
-          <p:cNvPr id="7" name="Text 5"/>
-          <p:cNvSpPr/>
-          <p:nvPr/>
-        </p:nvSpPr>
-        <p:spPr>
-          <a:xfrm>
-            <a:off x="320040" y="1389888"/>
-            <a:ext cx="475488" cy="795528"/>
+          <p:cNvPr id="9" name="Text 7"/>
+          <p:cNvSpPr/>
+          <p:nvPr/>
+        </p:nvSpPr>
+        <p:spPr>
+          <a:xfrm>
+            <a:off x="320040" y="1591056"/>
+            <a:ext cx="475488" cy="749808"/>
           </a:xfrm>
           <a:prstGeom prst="rect">
             <a:avLst/>
@@ -4029,14 +4590,14 @@
       </p:sp>
       <p:sp>
         <p:nvSpPr>
-          <p:cNvPr id="8" name="Text 6"/>
-          <p:cNvSpPr/>
-          <p:nvPr/>
-        </p:nvSpPr>
-        <p:spPr>
-          <a:xfrm>
-            <a:off x="886968" y="1444752"/>
-            <a:ext cx="2103120" cy="292608"/>
+          <p:cNvPr id="10" name="Text 8"/>
+          <p:cNvSpPr/>
+          <p:nvPr/>
+        </p:nvSpPr>
+        <p:spPr>
+          <a:xfrm>
+            <a:off x="886968" y="1645920"/>
+            <a:ext cx="2194560" cy="274320"/>
           </a:xfrm>
           <a:prstGeom prst="rect">
             <a:avLst/>
@@ -4057,7 +4618,7 @@
                   <a:srgbClr val="4A7FA8"/>
                 </a:solidFill>
               </a:rPr>
-              <a:t>Map your HITL gates</a:t>
+              <a:t>Tools audit</a:t>
             </a:r>
             <a:endParaRPr lang="en-US" sz="1250" dirty="0"/>
           </a:p>
@@ -4065,14 +4626,14 @@
       </p:sp>
       <p:sp>
         <p:nvSpPr>
-          <p:cNvPr id="9" name="Text 7"/>
-          <p:cNvSpPr/>
-          <p:nvPr/>
-        </p:nvSpPr>
-        <p:spPr>
-          <a:xfrm>
-            <a:off x="2990088" y="1444752"/>
-            <a:ext cx="777240" cy="292608"/>
+          <p:cNvPr id="11" name="Text 9"/>
+          <p:cNvSpPr/>
+          <p:nvPr/>
+        </p:nvSpPr>
+        <p:spPr>
+          <a:xfrm>
+            <a:off x="3081528" y="1645920"/>
+            <a:ext cx="777240" cy="274320"/>
           </a:xfrm>
           <a:prstGeom prst="rect">
             <a:avLst/>
@@ -4101,50 +4662,50 @@
       </p:sp>
       <p:sp>
         <p:nvSpPr>
-          <p:cNvPr id="10" name="Text 8"/>
-          <p:cNvSpPr/>
-          <p:nvPr/>
-        </p:nvSpPr>
-        <p:spPr>
-          <a:xfrm>
-            <a:off x="886968" y="1792224"/>
-            <a:ext cx="7818120" cy="329184"/>
-          </a:xfrm>
-          <a:prstGeom prst="rect">
-            <a:avLst/>
-          </a:prstGeom>
-          <a:noFill/>
-          <a:ln/>
-        </p:spPr>
-        <p:txBody>
-          <a:bodyPr wrap="square" lIns="0" tIns="0" rIns="0" bIns="0" rtlCol="0" anchor="ctr"/>
-          <a:lstStyle/>
-          <a:p>
-            <a:pPr indent="0" marL="0">
-              <a:buNone/>
-            </a:pPr>
-            <a:r>
-              <a:rPr lang="en-US" sz="1100" dirty="0">
+          <p:cNvPr id="12" name="Text 10"/>
+          <p:cNvSpPr/>
+          <p:nvPr/>
+        </p:nvSpPr>
+        <p:spPr>
+          <a:xfrm>
+            <a:off x="886968" y="1975104"/>
+            <a:ext cx="7818120" cy="310896"/>
+          </a:xfrm>
+          <a:prstGeom prst="rect">
+            <a:avLst/>
+          </a:prstGeom>
+          <a:noFill/>
+          <a:ln/>
+        </p:spPr>
+        <p:txBody>
+          <a:bodyPr wrap="square" lIns="0" tIns="0" rIns="0" bIns="0" rtlCol="0" anchor="ctr"/>
+          <a:lstStyle/>
+          <a:p>
+            <a:pPr indent="0" marL="0">
+              <a:buNone/>
+            </a:pPr>
+            <a:r>
+              <a:rPr lang="en-US" sz="1050" dirty="0">
                 <a:solidFill>
                   <a:srgbClr val="7A90A8"/>
                 </a:solidFill>
               </a:rPr>
-              <a:t>For the workflow you designed in Module 2, place every agent action into the 3-tier HITL model. Where are your hard gates? Where can you fully automate? Where are the soft gates?</a:t>
-            </a:r>
-            <a:endParaRPr lang="en-US" sz="1100" dirty="0"/>
-          </a:p>
-        </p:txBody>
-      </p:sp>
-      <p:sp>
-        <p:nvSpPr>
-          <p:cNvPr id="11" name="Shape 9"/>
-          <p:cNvSpPr/>
-          <p:nvPr/>
-        </p:nvSpPr>
-        <p:spPr>
-          <a:xfrm>
-            <a:off x="320040" y="2276856"/>
-            <a:ext cx="8503920" cy="795528"/>
+              <a:t>List every tool Claude Code has access to (file read, file write, shell, git, etc.). For each: worst-case misuse? Blast radius? Is a human approval gate in place before irreversible actions?</a:t>
+            </a:r>
+            <a:endParaRPr lang="en-US" sz="1050" dirty="0"/>
+          </a:p>
+        </p:txBody>
+      </p:sp>
+      <p:sp>
+        <p:nvSpPr>
+          <p:cNvPr id="13" name="Shape 11"/>
+          <p:cNvSpPr/>
+          <p:nvPr/>
+        </p:nvSpPr>
+        <p:spPr>
+          <a:xfrm>
+            <a:off x="320040" y="2414016"/>
+            <a:ext cx="8503920" cy="749808"/>
           </a:xfrm>
           <a:prstGeom prst="rect">
             <a:avLst/>
@@ -4164,14 +4725,14 @@
       </p:sp>
       <p:sp>
         <p:nvSpPr>
-          <p:cNvPr id="12" name="Shape 10"/>
-          <p:cNvSpPr/>
-          <p:nvPr/>
-        </p:nvSpPr>
-        <p:spPr>
-          <a:xfrm>
-            <a:off x="320040" y="2276856"/>
-            <a:ext cx="475488" cy="795528"/>
+          <p:cNvPr id="14" name="Shape 12"/>
+          <p:cNvSpPr/>
+          <p:nvPr/>
+        </p:nvSpPr>
+        <p:spPr>
+          <a:xfrm>
+            <a:off x="320040" y="2414016"/>
+            <a:ext cx="475488" cy="749808"/>
           </a:xfrm>
           <a:prstGeom prst="rect">
             <a:avLst/>
@@ -4184,14 +4745,14 @@
       </p:sp>
       <p:sp>
         <p:nvSpPr>
-          <p:cNvPr id="13" name="Text 11"/>
-          <p:cNvSpPr/>
-          <p:nvPr/>
-        </p:nvSpPr>
-        <p:spPr>
-          <a:xfrm>
-            <a:off x="320040" y="2276856"/>
-            <a:ext cx="475488" cy="795528"/>
+          <p:cNvPr id="15" name="Text 13"/>
+          <p:cNvSpPr/>
+          <p:nvPr/>
+        </p:nvSpPr>
+        <p:spPr>
+          <a:xfrm>
+            <a:off x="320040" y="2414016"/>
+            <a:ext cx="475488" cy="749808"/>
           </a:xfrm>
           <a:prstGeom prst="rect">
             <a:avLst/>
@@ -4220,14 +4781,14 @@
       </p:sp>
       <p:sp>
         <p:nvSpPr>
-          <p:cNvPr id="14" name="Text 12"/>
-          <p:cNvSpPr/>
-          <p:nvPr/>
-        </p:nvSpPr>
-        <p:spPr>
-          <a:xfrm>
-            <a:off x="886968" y="2331720"/>
-            <a:ext cx="2103120" cy="292608"/>
+          <p:cNvPr id="16" name="Text 14"/>
+          <p:cNvSpPr/>
+          <p:nvPr/>
+        </p:nvSpPr>
+        <p:spPr>
+          <a:xfrm>
+            <a:off x="886968" y="2468880"/>
+            <a:ext cx="2194560" cy="274320"/>
           </a:xfrm>
           <a:prstGeom prst="rect">
             <a:avLst/>
@@ -4248,7 +4809,7 @@
                   <a:srgbClr val="4A7FA8"/>
                 </a:solidFill>
               </a:rPr>
-              <a:t>Write your PR review checklist</a:t>
+              <a:t>Prompt injection surface</a:t>
             </a:r>
             <a:endParaRPr lang="en-US" sz="1250" dirty="0"/>
           </a:p>
@@ -4256,14 +4817,14 @@
       </p:sp>
       <p:sp>
         <p:nvSpPr>
-          <p:cNvPr id="15" name="Text 13"/>
-          <p:cNvSpPr/>
-          <p:nvPr/>
-        </p:nvSpPr>
-        <p:spPr>
-          <a:xfrm>
-            <a:off x="2990088" y="2331720"/>
-            <a:ext cx="777240" cy="292608"/>
+          <p:cNvPr id="17" name="Text 15"/>
+          <p:cNvSpPr/>
+          <p:nvPr/>
+        </p:nvSpPr>
+        <p:spPr>
+          <a:xfrm>
+            <a:off x="3081528" y="2468880"/>
+            <a:ext cx="777240" cy="274320"/>
           </a:xfrm>
           <a:prstGeom prst="rect">
             <a:avLst/>
@@ -4284,7 +4845,7 @@
                   <a:srgbClr val="7A90A8"/>
                 </a:solidFill>
               </a:rPr>
-              <a:t>(8 min)</a:t>
+              <a:t>(7 min)</a:t>
             </a:r>
             <a:endParaRPr lang="en-US" sz="1100" dirty="0"/>
           </a:p>
@@ -4292,50 +4853,50 @@
       </p:sp>
       <p:sp>
         <p:nvSpPr>
-          <p:cNvPr id="16" name="Text 14"/>
-          <p:cNvSpPr/>
-          <p:nvPr/>
-        </p:nvSpPr>
-        <p:spPr>
-          <a:xfrm>
-            <a:off x="886968" y="2679192"/>
-            <a:ext cx="7818120" cy="329184"/>
-          </a:xfrm>
-          <a:prstGeom prst="rect">
-            <a:avLst/>
-          </a:prstGeom>
-          <a:noFill/>
-          <a:ln/>
-        </p:spPr>
-        <p:txBody>
-          <a:bodyPr wrap="square" lIns="0" tIns="0" rIns="0" bIns="0" rtlCol="0" anchor="ctr"/>
-          <a:lstStyle/>
-          <a:p>
-            <a:pPr indent="0" marL="0">
-              <a:buNone/>
-            </a:pPr>
-            <a:r>
-              <a:rPr lang="en-US" sz="1100" dirty="0">
+          <p:cNvPr id="18" name="Text 16"/>
+          <p:cNvSpPr/>
+          <p:nvPr/>
+        </p:nvSpPr>
+        <p:spPr>
+          <a:xfrm>
+            <a:off x="886968" y="2798064"/>
+            <a:ext cx="7818120" cy="310896"/>
+          </a:xfrm>
+          <a:prstGeom prst="rect">
+            <a:avLst/>
+          </a:prstGeom>
+          <a:noFill/>
+          <a:ln/>
+        </p:spPr>
+        <p:txBody>
+          <a:bodyPr wrap="square" lIns="0" tIns="0" rIns="0" bIns="0" rtlCol="0" anchor="ctr"/>
+          <a:lstStyle/>
+          <a:p>
+            <a:pPr indent="0" marL="0">
+              <a:buNone/>
+            </a:pPr>
+            <a:r>
+              <a:rPr lang="en-US" sz="1050" dirty="0">
                 <a:solidFill>
                   <a:srgbClr val="7A90A8"/>
                 </a:solidFill>
               </a:rPr>
-              <a:t>Using the 6-dimension framework from Slide 5, create a PR template checklist for your team’s first agentic PR. What would a reviewer actually check for AI-generated code?</a:t>
-            </a:r>
-            <a:endParaRPr lang="en-US" sz="1100" dirty="0"/>
-          </a:p>
-        </p:txBody>
-      </p:sp>
-      <p:sp>
-        <p:nvSpPr>
-          <p:cNvPr id="17" name="Shape 15"/>
-          <p:cNvSpPr/>
-          <p:nvPr/>
-        </p:nvSpPr>
-        <p:spPr>
-          <a:xfrm>
-            <a:off x="320040" y="3163824"/>
-            <a:ext cx="8503920" cy="795528"/>
+              <a:t>What external data does Claude Code read in this workflow (docs, test output, README files, tickets)? Could any of that content contain instructions that hijack the agent? How would you detect it?</a:t>
+            </a:r>
+            <a:endParaRPr lang="en-US" sz="1050" dirty="0"/>
+          </a:p>
+        </p:txBody>
+      </p:sp>
+      <p:sp>
+        <p:nvSpPr>
+          <p:cNvPr id="19" name="Shape 17"/>
+          <p:cNvSpPr/>
+          <p:nvPr/>
+        </p:nvSpPr>
+        <p:spPr>
+          <a:xfrm>
+            <a:off x="320040" y="3236976"/>
+            <a:ext cx="8503920" cy="749808"/>
           </a:xfrm>
           <a:prstGeom prst="rect">
             <a:avLst/>
@@ -4355,14 +4916,14 @@
       </p:sp>
       <p:sp>
         <p:nvSpPr>
-          <p:cNvPr id="18" name="Shape 16"/>
-          <p:cNvSpPr/>
-          <p:nvPr/>
-        </p:nvSpPr>
-        <p:spPr>
-          <a:xfrm>
-            <a:off x="320040" y="3163824"/>
-            <a:ext cx="475488" cy="795528"/>
+          <p:cNvPr id="20" name="Shape 18"/>
+          <p:cNvSpPr/>
+          <p:nvPr/>
+        </p:nvSpPr>
+        <p:spPr>
+          <a:xfrm>
+            <a:off x="320040" y="3236976"/>
+            <a:ext cx="475488" cy="749808"/>
           </a:xfrm>
           <a:prstGeom prst="rect">
             <a:avLst/>
@@ -4375,14 +4936,14 @@
       </p:sp>
       <p:sp>
         <p:nvSpPr>
-          <p:cNvPr id="19" name="Text 17"/>
-          <p:cNvSpPr/>
-          <p:nvPr/>
-        </p:nvSpPr>
-        <p:spPr>
-          <a:xfrm>
-            <a:off x="320040" y="3163824"/>
-            <a:ext cx="475488" cy="795528"/>
+          <p:cNvPr id="21" name="Text 19"/>
+          <p:cNvSpPr/>
+          <p:nvPr/>
+        </p:nvSpPr>
+        <p:spPr>
+          <a:xfrm>
+            <a:off x="320040" y="3236976"/>
+            <a:ext cx="475488" cy="749808"/>
           </a:xfrm>
           <a:prstGeom prst="rect">
             <a:avLst/>
@@ -4411,14 +4972,14 @@
       </p:sp>
       <p:sp>
         <p:nvSpPr>
-          <p:cNvPr id="20" name="Text 18"/>
-          <p:cNvSpPr/>
-          <p:nvPr/>
-        </p:nvSpPr>
-        <p:spPr>
-          <a:xfrm>
-            <a:off x="886968" y="3218688"/>
-            <a:ext cx="2103120" cy="292608"/>
+          <p:cNvPr id="22" name="Text 20"/>
+          <p:cNvSpPr/>
+          <p:nvPr/>
+        </p:nvSpPr>
+        <p:spPr>
+          <a:xfrm>
+            <a:off x="886968" y="3291840"/>
+            <a:ext cx="2194560" cy="274320"/>
           </a:xfrm>
           <a:prstGeom prst="rect">
             <a:avLst/>
@@ -4439,7 +5000,7 @@
                   <a:srgbClr val="4A7FA8"/>
                 </a:solidFill>
               </a:rPr>
-              <a:t>Draft a DoD</a:t>
+              <a:t>Define three SLOs</a:t>
             </a:r>
             <a:endParaRPr lang="en-US" sz="1250" dirty="0"/>
           </a:p>
@@ -4447,14 +5008,14 @@
       </p:sp>
       <p:sp>
         <p:nvSpPr>
-          <p:cNvPr id="21" name="Text 19"/>
-          <p:cNvSpPr/>
-          <p:nvPr/>
-        </p:nvSpPr>
-        <p:spPr>
-          <a:xfrm>
-            <a:off x="2990088" y="3218688"/>
-            <a:ext cx="777240" cy="292608"/>
+          <p:cNvPr id="23" name="Text 21"/>
+          <p:cNvSpPr/>
+          <p:nvPr/>
+        </p:nvSpPr>
+        <p:spPr>
+          <a:xfrm>
+            <a:off x="3081528" y="3291840"/>
+            <a:ext cx="777240" cy="274320"/>
           </a:xfrm>
           <a:prstGeom prst="rect">
             <a:avLst/>
@@ -4475,7 +5036,7 @@
                   <a:srgbClr val="7A90A8"/>
                 </a:solidFill>
               </a:rPr>
-              <a:t>(7 min)</a:t>
+              <a:t>(8 min)</a:t>
             </a:r>
             <a:endParaRPr lang="en-US" sz="1100" dirty="0"/>
           </a:p>
@@ -4483,50 +5044,50 @@
       </p:sp>
       <p:sp>
         <p:nvSpPr>
-          <p:cNvPr id="22" name="Text 20"/>
-          <p:cNvSpPr/>
-          <p:nvPr/>
-        </p:nvSpPr>
-        <p:spPr>
-          <a:xfrm>
-            <a:off x="886968" y="3566160"/>
-            <a:ext cx="7818120" cy="329184"/>
-          </a:xfrm>
-          <a:prstGeom prst="rect">
-            <a:avLst/>
-          </a:prstGeom>
-          <a:noFill/>
-          <a:ln/>
-        </p:spPr>
-        <p:txBody>
-          <a:bodyPr wrap="square" lIns="0" tIns="0" rIns="0" bIns="0" rtlCol="0" anchor="ctr"/>
-          <a:lstStyle/>
-          <a:p>
-            <a:pPr indent="0" marL="0">
-              <a:buNone/>
-            </a:pPr>
-            <a:r>
-              <a:rPr lang="en-US" sz="1100" dirty="0">
+          <p:cNvPr id="24" name="Text 22"/>
+          <p:cNvSpPr/>
+          <p:nvPr/>
+        </p:nvSpPr>
+        <p:spPr>
+          <a:xfrm>
+            <a:off x="886968" y="3621024"/>
+            <a:ext cx="7818120" cy="310896"/>
+          </a:xfrm>
+          <a:prstGeom prst="rect">
+            <a:avLst/>
+          </a:prstGeom>
+          <a:noFill/>
+          <a:ln/>
+        </p:spPr>
+        <p:txBody>
+          <a:bodyPr wrap="square" lIns="0" tIns="0" rIns="0" bIns="0" rtlCol="0" anchor="ctr"/>
+          <a:lstStyle/>
+          <a:p>
+            <a:pPr indent="0" marL="0">
+              <a:buNone/>
+            </a:pPr>
+            <a:r>
+              <a:rPr lang="en-US" sz="1050" dirty="0">
                 <a:solidFill>
                   <a:srgbClr val="7A90A8"/>
                 </a:solidFill>
               </a:rPr>
-              <a:t>Write a Definition of Done for a feature your team is planning. Include: AC coverage, code quality, test requirements, and documentation. Make every item machine-verifiable.</a:t>
-            </a:r>
-            <a:endParaRPr lang="en-US" sz="1100" dirty="0"/>
-          </a:p>
-        </p:txBody>
-      </p:sp>
-      <p:sp>
-        <p:nvSpPr>
-          <p:cNvPr id="23" name="Shape 21"/>
-          <p:cNvSpPr/>
-          <p:nvPr/>
-        </p:nvSpPr>
-        <p:spPr>
-          <a:xfrm>
-            <a:off x="320040" y="4050792"/>
-            <a:ext cx="8503920" cy="795528"/>
+              <a:t>Write three measurable SLOs for the coding agent workflow. At least one must be cost-related (e.g. cost_per_task) and one quality-related (e.g. eval_score). Use the formats from Slide 10.</a:t>
+            </a:r>
+            <a:endParaRPr lang="en-US" sz="1050" dirty="0"/>
+          </a:p>
+        </p:txBody>
+      </p:sp>
+      <p:sp>
+        <p:nvSpPr>
+          <p:cNvPr id="25" name="Shape 23"/>
+          <p:cNvSpPr/>
+          <p:nvPr/>
+        </p:nvSpPr>
+        <p:spPr>
+          <a:xfrm>
+            <a:off x="320040" y="4059936"/>
+            <a:ext cx="8503920" cy="749808"/>
           </a:xfrm>
           <a:prstGeom prst="rect">
             <a:avLst/>
@@ -4546,14 +5107,14 @@
       </p:sp>
       <p:sp>
         <p:nvSpPr>
-          <p:cNvPr id="24" name="Shape 22"/>
-          <p:cNvSpPr/>
-          <p:nvPr/>
-        </p:nvSpPr>
-        <p:spPr>
-          <a:xfrm>
-            <a:off x="320040" y="4050792"/>
-            <a:ext cx="475488" cy="795528"/>
+          <p:cNvPr id="26" name="Shape 24"/>
+          <p:cNvSpPr/>
+          <p:nvPr/>
+        </p:nvSpPr>
+        <p:spPr>
+          <a:xfrm>
+            <a:off x="320040" y="4059936"/>
+            <a:ext cx="475488" cy="749808"/>
           </a:xfrm>
           <a:prstGeom prst="rect">
             <a:avLst/>
@@ -4566,14 +5127,14 @@
       </p:sp>
       <p:sp>
         <p:nvSpPr>
-          <p:cNvPr id="25" name="Text 23"/>
-          <p:cNvSpPr/>
-          <p:nvPr/>
-        </p:nvSpPr>
-        <p:spPr>
-          <a:xfrm>
-            <a:off x="320040" y="4050792"/>
-            <a:ext cx="475488" cy="795528"/>
+          <p:cNvPr id="27" name="Text 25"/>
+          <p:cNvSpPr/>
+          <p:nvPr/>
+        </p:nvSpPr>
+        <p:spPr>
+          <a:xfrm>
+            <a:off x="320040" y="4059936"/>
+            <a:ext cx="475488" cy="749808"/>
           </a:xfrm>
           <a:prstGeom prst="rect">
             <a:avLst/>
@@ -4602,14 +5163,14 @@
       </p:sp>
       <p:sp>
         <p:nvSpPr>
-          <p:cNvPr id="26" name="Text 24"/>
-          <p:cNvSpPr/>
-          <p:nvPr/>
-        </p:nvSpPr>
-        <p:spPr>
-          <a:xfrm>
-            <a:off x="886968" y="4105656"/>
-            <a:ext cx="2103120" cy="292608"/>
+          <p:cNvPr id="28" name="Text 26"/>
+          <p:cNvSpPr/>
+          <p:nvPr/>
+        </p:nvSpPr>
+        <p:spPr>
+          <a:xfrm>
+            <a:off x="886968" y="4114800"/>
+            <a:ext cx="2194560" cy="274320"/>
           </a:xfrm>
           <a:prstGeom prst="rect">
             <a:avLst/>
@@ -4630,7 +5191,7 @@
                   <a:srgbClr val="4A7FA8"/>
                 </a:solidFill>
               </a:rPr>
-              <a:t>Identify your feedback loop gap</a:t>
+              <a:t>Observability design</a:t>
             </a:r>
             <a:endParaRPr lang="en-US" sz="1250" dirty="0"/>
           </a:p>
@@ -4638,14 +5199,14 @@
       </p:sp>
       <p:sp>
         <p:nvSpPr>
-          <p:cNvPr id="27" name="Text 25"/>
-          <p:cNvSpPr/>
-          <p:nvPr/>
-        </p:nvSpPr>
-        <p:spPr>
-          <a:xfrm>
-            <a:off x="2990088" y="4105656"/>
-            <a:ext cx="777240" cy="292608"/>
+          <p:cNvPr id="29" name="Text 27"/>
+          <p:cNvSpPr/>
+          <p:nvPr/>
+        </p:nvSpPr>
+        <p:spPr>
+          <a:xfrm>
+            <a:off x="3081528" y="4114800"/>
+            <a:ext cx="777240" cy="274320"/>
           </a:xfrm>
           <a:prstGeom prst="rect">
             <a:avLst/>
@@ -4674,37 +5235,37 @@
       </p:sp>
       <p:sp>
         <p:nvSpPr>
-          <p:cNvPr id="28" name="Text 26"/>
-          <p:cNvSpPr/>
-          <p:nvPr/>
-        </p:nvSpPr>
-        <p:spPr>
-          <a:xfrm>
-            <a:off x="886968" y="4453128"/>
-            <a:ext cx="7818120" cy="329184"/>
-          </a:xfrm>
-          <a:prstGeom prst="rect">
-            <a:avLst/>
-          </a:prstGeom>
-          <a:noFill/>
-          <a:ln/>
-        </p:spPr>
-        <p:txBody>
-          <a:bodyPr wrap="square" lIns="0" tIns="0" rIns="0" bIns="0" rtlCol="0" anchor="ctr"/>
-          <a:lstStyle/>
-          <a:p>
-            <a:pPr indent="0" marL="0">
-              <a:buNone/>
-            </a:pPr>
-            <a:r>
-              <a:rPr lang="en-US" sz="1100" dirty="0">
+          <p:cNvPr id="30" name="Text 28"/>
+          <p:cNvSpPr/>
+          <p:nvPr/>
+        </p:nvSpPr>
+        <p:spPr>
+          <a:xfrm>
+            <a:off x="886968" y="4443984"/>
+            <a:ext cx="7818120" cy="310896"/>
+          </a:xfrm>
+          <a:prstGeom prst="rect">
+            <a:avLst/>
+          </a:prstGeom>
+          <a:noFill/>
+          <a:ln/>
+        </p:spPr>
+        <p:txBody>
+          <a:bodyPr wrap="square" lIns="0" tIns="0" rIns="0" bIns="0" rtlCol="0" anchor="ctr"/>
+          <a:lstStyle/>
+          <a:p>
+            <a:pPr indent="0" marL="0">
+              <a:buNone/>
+            </a:pPr>
+            <a:r>
+              <a:rPr lang="en-US" sz="1050" dirty="0">
                 <a:solidFill>
                   <a:srgbClr val="7A90A8"/>
                 </a:solidFill>
               </a:rPr>
-              <a:t>Where in your current process does the loop from production bug back to SPEC.md update break down? What’s missing? Design the one improvement that would have the highest impact.</a:t>
-            </a:r>
-            <a:endParaRPr lang="en-US" sz="1100" dirty="0"/>
+              <a:t>What traces, metrics, and logs would you need to diagnose a bad agent run at 2am? What tool surfaces them (Langfuse, Honeycomb, custom OTel)? Who gets paged?</a:t>
+            </a:r>
+            <a:endParaRPr lang="en-US" sz="1050" dirty="0"/>
           </a:p>
         </p:txBody>
       </p:sp>
@@ -6038,7 +6599,7 @@
                   <a:srgbClr val="5B8DB8"/>
                 </a:solidFill>
               </a:rPr>
-              <a:t>SUPERVISED DEVELOPMENT  —  THE NEW CONTRACT</a:t>
+              <a:t>BACKGROUND  —  WHY OBSERVABILITY IS DIFFERENT FOR AGENTS</a:t>
             </a:r>
             <a:endParaRPr lang="en-US" sz="1300" dirty="0"/>
           </a:p>
@@ -6046,21 +6607,57 @@
       </p:sp>
       <p:sp>
         <p:nvSpPr>
-          <p:cNvPr id="3" name="Shape 1"/>
-          <p:cNvSpPr/>
-          <p:nvPr/>
-        </p:nvSpPr>
-        <p:spPr>
-          <a:xfrm>
-            <a:off x="320040" y="749808"/>
-            <a:ext cx="8503920" cy="1005840"/>
-          </a:xfrm>
-          <a:prstGeom prst="rect">
-            <a:avLst/>
-          </a:prstGeom>
-          <a:solidFill>
-            <a:srgbClr val="2E5073">
-              <a:alpha val="85000"/>
+          <p:cNvPr id="3" name="Text 1"/>
+          <p:cNvSpPr/>
+          <p:nvPr/>
+        </p:nvSpPr>
+        <p:spPr>
+          <a:xfrm>
+            <a:off x="365760" y="658368"/>
+            <a:ext cx="8412480" cy="384048"/>
+          </a:xfrm>
+          <a:prstGeom prst="rect">
+            <a:avLst/>
+          </a:prstGeom>
+          <a:noFill/>
+          <a:ln/>
+        </p:spPr>
+        <p:txBody>
+          <a:bodyPr wrap="square" lIns="0" tIns="0" rIns="0" bIns="0" rtlCol="0" anchor="ctr"/>
+          <a:lstStyle/>
+          <a:p>
+            <a:pPr indent="0" marL="0">
+              <a:buNone/>
+            </a:pPr>
+            <a:r>
+              <a:rPr lang="en-US" sz="1300" i="1" dirty="0">
+                <a:solidFill>
+                  <a:srgbClr val="D4E4F0"/>
+                </a:solidFill>
+              </a:rPr>
+              <a:t>Traditional observability was built for deterministic systems. Agentic systems require a new stack — one that captures what the model decided to do and why.</a:t>
+            </a:r>
+            <a:endParaRPr lang="en-US" sz="1300" dirty="0"/>
+          </a:p>
+        </p:txBody>
+      </p:sp>
+      <p:sp>
+        <p:nvSpPr>
+          <p:cNvPr id="4" name="Shape 2"/>
+          <p:cNvSpPr/>
+          <p:nvPr/>
+        </p:nvSpPr>
+        <p:spPr>
+          <a:xfrm>
+            <a:off x="320040" y="1170432"/>
+            <a:ext cx="8503920" cy="1481328"/>
+          </a:xfrm>
+          <a:prstGeom prst="rect">
+            <a:avLst/>
+          </a:prstGeom>
+          <a:solidFill>
+            <a:srgbClr val="3A7DC9">
+              <a:alpha val="90000"/>
             </a:srgbClr>
           </a:solidFill>
           <a:ln/>
@@ -6075,64 +6672,214 @@
       </p:sp>
       <p:sp>
         <p:nvSpPr>
-          <p:cNvPr id="4" name="Text 2"/>
-          <p:cNvSpPr/>
-          <p:nvPr/>
-        </p:nvSpPr>
-        <p:spPr>
-          <a:xfrm>
-            <a:off x="502920" y="804672"/>
-            <a:ext cx="8229600" cy="896112"/>
-          </a:xfrm>
-          <a:prstGeom prst="rect">
-            <a:avLst/>
-          </a:prstGeom>
-          <a:noFill/>
-          <a:ln/>
-        </p:spPr>
-        <p:txBody>
-          <a:bodyPr wrap="square" lIns="0" tIns="0" rIns="0" bIns="0" rtlCol="0" anchor="ctr"/>
-          <a:lstStyle/>
-          <a:p>
-            <a:pPr algn="ctr" indent="0" marL="0">
-              <a:buNone/>
-            </a:pPr>
-            <a:r>
-              <a:rPr lang="en-US" sz="1400" i="1" dirty="0">
+          <p:cNvPr id="5" name="Shape 3"/>
+          <p:cNvSpPr/>
+          <p:nvPr/>
+        </p:nvSpPr>
+        <p:spPr>
+          <a:xfrm>
+            <a:off x="320040" y="1170432"/>
+            <a:ext cx="8503920" cy="384048"/>
+          </a:xfrm>
+          <a:prstGeom prst="rect">
+            <a:avLst/>
+          </a:prstGeom>
+          <a:solidFill>
+            <a:srgbClr val="3A7DC9"/>
+          </a:solidFill>
+          <a:ln/>
+        </p:spPr>
+      </p:sp>
+      <p:sp>
+        <p:nvSpPr>
+          <p:cNvPr id="6" name="Text 4"/>
+          <p:cNvSpPr/>
+          <p:nvPr/>
+        </p:nvSpPr>
+        <p:spPr>
+          <a:xfrm>
+            <a:off x="438912" y="1170432"/>
+            <a:ext cx="8229600" cy="384048"/>
+          </a:xfrm>
+          <a:prstGeom prst="rect">
+            <a:avLst/>
+          </a:prstGeom>
+          <a:noFill/>
+          <a:ln/>
+        </p:spPr>
+        <p:txBody>
+          <a:bodyPr wrap="square" lIns="0" tIns="0" rIns="0" bIns="0" rtlCol="0" anchor="ctr"/>
+          <a:lstStyle/>
+          <a:p>
+            <a:pPr indent="0" marL="0">
+              <a:buNone/>
+            </a:pPr>
+            <a:r>
+              <a:rPr lang="en-US" sz="1200" b="1" spc="200" kern="0" dirty="0">
                 <a:solidFill>
                   <a:srgbClr val="FFFFFF"/>
                 </a:solidFill>
               </a:rPr>
-              <a:t>“When I speak to my most senior engineers — the best developers we have — they say they have not written a single line of code since December. They only generate code and supervise it.”</a:t>
-            </a:r>
-            <a:endParaRPr lang="en-US" sz="1400" dirty="0"/>
-          </a:p>
-          <a:p>
-            <a:pPr algn="ctr" indent="0" marL="0">
-              <a:buNone/>
-            </a:pPr>
-            <a:r>
-              <a:rPr lang="en-US" sz="1400" i="1" dirty="0">
+              <a:t>PROGRAMME SCOPE NOTE  —  TWO LEVELS</a:t>
+            </a:r>
+            <a:endParaRPr lang="en-US" sz="1200" dirty="0"/>
+          </a:p>
+        </p:txBody>
+      </p:sp>
+      <p:sp>
+        <p:nvSpPr>
+          <p:cNvPr id="7" name="Text 5"/>
+          <p:cNvSpPr/>
+          <p:nvPr/>
+        </p:nvSpPr>
+        <p:spPr>
+          <a:xfrm>
+            <a:off x="457200" y="1627632"/>
+            <a:ext cx="8229600" cy="256032"/>
+          </a:xfrm>
+          <a:prstGeom prst="rect">
+            <a:avLst/>
+          </a:prstGeom>
+          <a:noFill/>
+          <a:ln/>
+        </p:spPr>
+        <p:txBody>
+          <a:bodyPr wrap="square" lIns="0" tIns="0" rIns="0" bIns="0" rtlCol="0" anchor="ctr"/>
+          <a:lstStyle/>
+          <a:p>
+            <a:pPr indent="0" marL="0">
+              <a:buNone/>
+            </a:pPr>
+            <a:r>
+              <a:rPr lang="en-US" sz="1200" dirty="0">
+                <a:solidFill>
+                  <a:srgbClr val="D4E4F0"/>
+                </a:solidFill>
+              </a:rPr>
+              <a:t>This module covers observability, reliability, and security concepts at two levels:</a:t>
+            </a:r>
+            <a:endParaRPr lang="en-US" sz="1200" dirty="0"/>
+          </a:p>
+        </p:txBody>
+      </p:sp>
+      <p:sp>
+        <p:nvSpPr>
+          <p:cNvPr id="8" name="Text 6"/>
+          <p:cNvSpPr/>
+          <p:nvPr/>
+        </p:nvSpPr>
+        <p:spPr>
+          <a:xfrm>
+            <a:off x="457200" y="1901952"/>
+            <a:ext cx="8229600" cy="329184"/>
+          </a:xfrm>
+          <a:prstGeom prst="rect">
+            <a:avLst/>
+          </a:prstGeom>
+          <a:noFill/>
+          <a:ln/>
+        </p:spPr>
+        <p:txBody>
+          <a:bodyPr wrap="square" lIns="0" tIns="0" rIns="0" bIns="0" rtlCol="0" anchor="ctr"/>
+          <a:lstStyle/>
+          <a:p>
+            <a:pPr indent="0" marL="0">
+              <a:buNone/>
+            </a:pPr>
+            <a:r>
+              <a:rPr lang="en-US" sz="1150" dirty="0">
                 <a:solidFill>
                   <a:srgbClr val="FFFFFF"/>
                 </a:solidFill>
               </a:rPr>
-              <a:t>— Alex Söderström, Spotify Co-CEO  ·  Q4 2025 Earnings Call</a:t>
-            </a:r>
-            <a:endParaRPr lang="en-US" sz="1400" dirty="0"/>
-          </a:p>
-        </p:txBody>
-      </p:sp>
-      <p:sp>
-        <p:nvSpPr>
-          <p:cNvPr id="5" name="Shape 3"/>
-          <p:cNvSpPr/>
-          <p:nvPr/>
-        </p:nvSpPr>
-        <p:spPr>
-          <a:xfrm>
-            <a:off x="320040" y="1901952"/>
-            <a:ext cx="8503920" cy="329184"/>
+              <a:t>■  Your coding agent workflows (Claude Code, Copilot) — monitoring the development loop: what did the agent do, what did it cost, where did it go wrong?</a:t>
+            </a:r>
+            <a:endParaRPr lang="en-US" sz="1150" dirty="0"/>
+          </a:p>
+        </p:txBody>
+      </p:sp>
+      <p:sp>
+        <p:nvSpPr>
+          <p:cNvPr id="9" name="Text 7"/>
+          <p:cNvSpPr/>
+          <p:nvPr/>
+        </p:nvSpPr>
+        <p:spPr>
+          <a:xfrm>
+            <a:off x="457200" y="2249424"/>
+            <a:ext cx="8229600" cy="329184"/>
+          </a:xfrm>
+          <a:prstGeom prst="rect">
+            <a:avLst/>
+          </a:prstGeom>
+          <a:noFill/>
+          <a:ln/>
+        </p:spPr>
+        <p:txBody>
+          <a:bodyPr wrap="square" lIns="0" tIns="0" rIns="0" bIns="0" rtlCol="0" anchor="ctr"/>
+          <a:lstStyle/>
+          <a:p>
+            <a:pPr indent="0" marL="0">
+              <a:buNone/>
+            </a:pPr>
+            <a:r>
+              <a:rPr lang="en-US" sz="1150" dirty="0">
+                <a:solidFill>
+                  <a:srgbClr val="5B8DB8"/>
+                </a:solidFill>
+              </a:rPr>
+              <a:t>■  Production agent systems (AWS Bedrock, Agent Core) — what governance and instrumentation production agents require before going live.</a:t>
+            </a:r>
+            <a:endParaRPr lang="en-US" sz="1150" dirty="0"/>
+          </a:p>
+        </p:txBody>
+      </p:sp>
+      <p:sp>
+        <p:nvSpPr>
+          <p:cNvPr id="10" name="Text 8"/>
+          <p:cNvSpPr/>
+          <p:nvPr/>
+        </p:nvSpPr>
+        <p:spPr>
+          <a:xfrm>
+            <a:off x="457200" y="2606040"/>
+            <a:ext cx="8229600" cy="237744"/>
+          </a:xfrm>
+          <a:prstGeom prst="rect">
+            <a:avLst/>
+          </a:prstGeom>
+          <a:noFill/>
+          <a:ln/>
+        </p:spPr>
+        <p:txBody>
+          <a:bodyPr wrap="square" lIns="0" tIns="0" rIns="0" bIns="0" rtlCol="0" anchor="ctr"/>
+          <a:lstStyle/>
+          <a:p>
+            <a:pPr indent="0" marL="0">
+              <a:buNone/>
+            </a:pPr>
+            <a:r>
+              <a:rPr lang="en-US" sz="1050" i="1" dirty="0">
+                <a:solidFill>
+                  <a:srgbClr val="8096B0"/>
+                </a:solidFill>
+              </a:rPr>
+              <a:t>Both levels matter. The concepts are the same; the implementation layer differs. Where an example is specific to production agents, it is marked as such.</a:t>
+            </a:r>
+            <a:endParaRPr lang="en-US" sz="1050" dirty="0"/>
+          </a:p>
+        </p:txBody>
+      </p:sp>
+      <p:sp>
+        <p:nvSpPr>
+          <p:cNvPr id="11" name="Shape 9"/>
+          <p:cNvSpPr/>
+          <p:nvPr/>
+        </p:nvSpPr>
+        <p:spPr>
+          <a:xfrm>
+            <a:off x="320040" y="2944368"/>
+            <a:ext cx="8503920" cy="310896"/>
           </a:xfrm>
           <a:prstGeom prst="rect">
             <a:avLst/>
@@ -6147,14 +6894,14 @@
       </p:sp>
       <p:sp>
         <p:nvSpPr>
-          <p:cNvPr id="6" name="Text 4"/>
-          <p:cNvSpPr/>
-          <p:nvPr/>
-        </p:nvSpPr>
-        <p:spPr>
-          <a:xfrm>
-            <a:off x="411480" y="1901952"/>
-            <a:ext cx="1645920" cy="329184"/>
+          <p:cNvPr id="12" name="Text 10"/>
+          <p:cNvSpPr/>
+          <p:nvPr/>
+        </p:nvSpPr>
+        <p:spPr>
+          <a:xfrm>
+            <a:off x="411480" y="2944368"/>
+            <a:ext cx="8229600" cy="310896"/>
           </a:xfrm>
           <a:prstGeom prst="rect">
             <a:avLst/>
@@ -6175,7 +6922,7 @@
                   <a:srgbClr val="5B8DB8"/>
                 </a:solidFill>
               </a:rPr>
-              <a:t>ROLE</a:t>
+              <a:t>THE THREE PILLARS, REVISITED FOR AGENTS</a:t>
             </a:r>
             <a:endParaRPr lang="en-US" sz="1000" dirty="0"/>
           </a:p>
@@ -6183,144 +6930,260 @@
       </p:sp>
       <p:sp>
         <p:nvSpPr>
-          <p:cNvPr id="7" name="Text 5"/>
-          <p:cNvSpPr/>
-          <p:nvPr/>
-        </p:nvSpPr>
-        <p:spPr>
-          <a:xfrm>
-            <a:off x="2194560" y="1901952"/>
-            <a:ext cx="3108960" cy="329184"/>
-          </a:xfrm>
-          <a:prstGeom prst="rect">
-            <a:avLst/>
-          </a:prstGeom>
-          <a:noFill/>
-          <a:ln/>
-        </p:spPr>
-        <p:txBody>
-          <a:bodyPr wrap="square" lIns="0" tIns="0" rIns="0" bIns="0" rtlCol="0" anchor="ctr"/>
-          <a:lstStyle/>
-          <a:p>
-            <a:pPr indent="0" marL="0">
-              <a:buNone/>
-            </a:pPr>
-            <a:r>
-              <a:rPr lang="en-US" sz="1000" b="1" spc="200" kern="0" dirty="0">
+          <p:cNvPr id="13" name="Shape 11"/>
+          <p:cNvSpPr/>
+          <p:nvPr/>
+        </p:nvSpPr>
+        <p:spPr>
+          <a:xfrm>
+            <a:off x="320040" y="3310128"/>
+            <a:ext cx="2697480" cy="1481328"/>
+          </a:xfrm>
+          <a:prstGeom prst="rect">
+            <a:avLst/>
+          </a:prstGeom>
+          <a:solidFill>
+            <a:srgbClr val="2E5073">
+              <a:alpha val="85000"/>
+            </a:srgbClr>
+          </a:solidFill>
+          <a:ln/>
+          <a:effectLst>
+            <a:outerShdw sx="100000" sy="100000" kx="0" ky="0" algn="bl" rotWithShape="0" blurRad="101600" dist="38100" dir="8100000">
+              <a:srgbClr val="000000">
+                <a:alpha val="13000"/>
+              </a:srgbClr>
+            </a:outerShdw>
+          </a:effectLst>
+        </p:spPr>
+      </p:sp>
+      <p:sp>
+        <p:nvSpPr>
+          <p:cNvPr id="14" name="Shape 12"/>
+          <p:cNvSpPr/>
+          <p:nvPr/>
+        </p:nvSpPr>
+        <p:spPr>
+          <a:xfrm>
+            <a:off x="320040" y="3310128"/>
+            <a:ext cx="2697480" cy="347472"/>
+          </a:xfrm>
+          <a:prstGeom prst="rect">
+            <a:avLst/>
+          </a:prstGeom>
+          <a:solidFill>
+            <a:srgbClr val="4A7FA8">
+              <a:alpha val="95000"/>
+            </a:srgbClr>
+          </a:solidFill>
+          <a:ln/>
+        </p:spPr>
+      </p:sp>
+      <p:sp>
+        <p:nvSpPr>
+          <p:cNvPr id="15" name="Text 13"/>
+          <p:cNvSpPr/>
+          <p:nvPr/>
+        </p:nvSpPr>
+        <p:spPr>
+          <a:xfrm>
+            <a:off x="320040" y="3310128"/>
+            <a:ext cx="2697480" cy="347472"/>
+          </a:xfrm>
+          <a:prstGeom prst="rect">
+            <a:avLst/>
+          </a:prstGeom>
+          <a:noFill/>
+          <a:ln/>
+        </p:spPr>
+        <p:txBody>
+          <a:bodyPr wrap="square" lIns="0" tIns="0" rIns="0" bIns="0" rtlCol="0" anchor="ctr"/>
+          <a:lstStyle/>
+          <a:p>
+            <a:pPr algn="ctr" indent="0" marL="0">
+              <a:buNone/>
+            </a:pPr>
+            <a:r>
+              <a:rPr lang="en-US" sz="1300" b="1" dirty="0">
+                <a:solidFill>
+                  <a:srgbClr val="FFFFFF"/>
+                </a:solidFill>
+              </a:rPr>
+              <a:t>Logs</a:t>
+            </a:r>
+            <a:endParaRPr lang="en-US" sz="1300" dirty="0"/>
+          </a:p>
+        </p:txBody>
+      </p:sp>
+      <p:sp>
+        <p:nvSpPr>
+          <p:cNvPr id="16" name="Text 14"/>
+          <p:cNvSpPr/>
+          <p:nvPr/>
+        </p:nvSpPr>
+        <p:spPr>
+          <a:xfrm>
+            <a:off x="411480" y="3730752"/>
+            <a:ext cx="2514600" cy="347472"/>
+          </a:xfrm>
+          <a:prstGeom prst="rect">
+            <a:avLst/>
+          </a:prstGeom>
+          <a:noFill/>
+          <a:ln/>
+        </p:spPr>
+        <p:txBody>
+          <a:bodyPr wrap="square" lIns="0" tIns="0" rIns="0" bIns="0" rtlCol="0" anchor="ctr"/>
+          <a:lstStyle/>
+          <a:p>
+            <a:pPr indent="0" marL="0">
+              <a:buNone/>
+            </a:pPr>
+            <a:r>
+              <a:rPr lang="en-US" sz="1050" dirty="0">
                 <a:solidFill>
                   <a:srgbClr val="8096B0"/>
                 </a:solidFill>
               </a:rPr>
-              <a:t>BEFORE (Chat Era)</a:t>
-            </a:r>
-            <a:endParaRPr lang="en-US" sz="1000" dirty="0"/>
-          </a:p>
-        </p:txBody>
-      </p:sp>
-      <p:sp>
-        <p:nvSpPr>
-          <p:cNvPr id="8" name="Text 6"/>
-          <p:cNvSpPr/>
-          <p:nvPr/>
-        </p:nvSpPr>
-        <p:spPr>
-          <a:xfrm>
-            <a:off x="5486400" y="1901952"/>
-            <a:ext cx="3200400" cy="329184"/>
-          </a:xfrm>
-          <a:prstGeom prst="rect">
-            <a:avLst/>
-          </a:prstGeom>
-          <a:noFill/>
-          <a:ln/>
-        </p:spPr>
-        <p:txBody>
-          <a:bodyPr wrap="square" lIns="0" tIns="0" rIns="0" bIns="0" rtlCol="0" anchor="ctr"/>
-          <a:lstStyle/>
-          <a:p>
-            <a:pPr indent="0" marL="0">
-              <a:buNone/>
-            </a:pPr>
-            <a:r>
-              <a:rPr lang="en-US" sz="1000" b="1" spc="200" kern="0" dirty="0">
-                <a:solidFill>
-                  <a:srgbClr val="3A7DC9"/>
-                </a:solidFill>
-              </a:rPr>
-              <a:t>AFTER (Agent Era)</a:t>
-            </a:r>
-            <a:endParaRPr lang="en-US" sz="1000" dirty="0"/>
-          </a:p>
-        </p:txBody>
-      </p:sp>
-      <p:sp>
-        <p:nvSpPr>
-          <p:cNvPr id="9" name="Shape 7"/>
-          <p:cNvSpPr/>
-          <p:nvPr/>
-        </p:nvSpPr>
-        <p:spPr>
-          <a:xfrm>
-            <a:off x="320040" y="2286000"/>
-            <a:ext cx="8503920" cy="621792"/>
+              <a:t>Traditional: Application events</a:t>
+            </a:r>
+            <a:endParaRPr lang="en-US" sz="1050" dirty="0"/>
+          </a:p>
+        </p:txBody>
+      </p:sp>
+      <p:sp>
+        <p:nvSpPr>
+          <p:cNvPr id="17" name="Text 15"/>
+          <p:cNvSpPr/>
+          <p:nvPr/>
+        </p:nvSpPr>
+        <p:spPr>
+          <a:xfrm>
+            <a:off x="411480" y="4133088"/>
+            <a:ext cx="2514600" cy="621792"/>
+          </a:xfrm>
+          <a:prstGeom prst="rect">
+            <a:avLst/>
+          </a:prstGeom>
+          <a:noFill/>
+          <a:ln/>
+        </p:spPr>
+        <p:txBody>
+          <a:bodyPr wrap="square" lIns="0" tIns="0" rIns="0" bIns="0" rtlCol="0" anchor="ctr"/>
+          <a:lstStyle/>
+          <a:p>
+            <a:pPr indent="0" marL="0">
+              <a:buNone/>
+            </a:pPr>
+            <a:r>
+              <a:rPr lang="en-US" sz="1050" dirty="0">
+                <a:solidFill>
+                  <a:srgbClr val="D4E4F0"/>
+                </a:solidFill>
+              </a:rPr>
+              <a:t>+ Agentic: Prompt/response pairs, tool call inputs/outputs, model version</a:t>
+            </a:r>
+            <a:endParaRPr lang="en-US" sz="1050" dirty="0"/>
+          </a:p>
+        </p:txBody>
+      </p:sp>
+      <p:sp>
+        <p:nvSpPr>
+          <p:cNvPr id="18" name="Shape 16"/>
+          <p:cNvSpPr/>
+          <p:nvPr/>
+        </p:nvSpPr>
+        <p:spPr>
+          <a:xfrm>
+            <a:off x="3172968" y="3310128"/>
+            <a:ext cx="2697480" cy="1481328"/>
           </a:xfrm>
           <a:prstGeom prst="rect">
             <a:avLst/>
           </a:prstGeom>
           <a:solidFill>
             <a:srgbClr val="2E5073">
-              <a:alpha val="75000"/>
+              <a:alpha val="85000"/>
             </a:srgbClr>
           </a:solidFill>
           <a:ln/>
-        </p:spPr>
-      </p:sp>
-      <p:sp>
-        <p:nvSpPr>
-          <p:cNvPr id="10" name="Text 8"/>
-          <p:cNvSpPr/>
-          <p:nvPr/>
-        </p:nvSpPr>
-        <p:spPr>
-          <a:xfrm>
-            <a:off x="411480" y="2286000"/>
-            <a:ext cx="1691640" cy="621792"/>
-          </a:xfrm>
-          <a:prstGeom prst="rect">
-            <a:avLst/>
-          </a:prstGeom>
-          <a:noFill/>
-          <a:ln/>
-        </p:spPr>
-        <p:txBody>
-          <a:bodyPr wrap="square" lIns="0" tIns="0" rIns="0" bIns="0" rtlCol="0" anchor="ctr"/>
-          <a:lstStyle/>
-          <a:p>
-            <a:pPr indent="0" marL="0">
-              <a:buNone/>
-            </a:pPr>
-            <a:r>
-              <a:rPr lang="en-US" sz="1200" b="1" dirty="0">
-                <a:solidFill>
-                  <a:srgbClr val="5B8DB8"/>
-                </a:solidFill>
-              </a:rPr>
-              <a:t>Code Author</a:t>
-            </a:r>
-            <a:endParaRPr lang="en-US" sz="1200" dirty="0"/>
-          </a:p>
-        </p:txBody>
-      </p:sp>
-      <p:sp>
-        <p:nvSpPr>
-          <p:cNvPr id="11" name="Text 9"/>
-          <p:cNvSpPr/>
-          <p:nvPr/>
-        </p:nvSpPr>
-        <p:spPr>
-          <a:xfrm>
-            <a:off x="2194560" y="2286000"/>
-            <a:ext cx="3108960" cy="621792"/>
+          <a:effectLst>
+            <a:outerShdw sx="100000" sy="100000" kx="0" ky="0" algn="bl" rotWithShape="0" blurRad="101600" dist="38100" dir="8100000">
+              <a:srgbClr val="000000">
+                <a:alpha val="13000"/>
+              </a:srgbClr>
+            </a:outerShdw>
+          </a:effectLst>
+        </p:spPr>
+      </p:sp>
+      <p:sp>
+        <p:nvSpPr>
+          <p:cNvPr id="19" name="Shape 17"/>
+          <p:cNvSpPr/>
+          <p:nvPr/>
+        </p:nvSpPr>
+        <p:spPr>
+          <a:xfrm>
+            <a:off x="3172968" y="3310128"/>
+            <a:ext cx="2697480" cy="347472"/>
+          </a:xfrm>
+          <a:prstGeom prst="rect">
+            <a:avLst/>
+          </a:prstGeom>
+          <a:solidFill>
+            <a:srgbClr val="3A7DC9">
+              <a:alpha val="95000"/>
+            </a:srgbClr>
+          </a:solidFill>
+          <a:ln/>
+        </p:spPr>
+      </p:sp>
+      <p:sp>
+        <p:nvSpPr>
+          <p:cNvPr id="20" name="Text 18"/>
+          <p:cNvSpPr/>
+          <p:nvPr/>
+        </p:nvSpPr>
+        <p:spPr>
+          <a:xfrm>
+            <a:off x="3172968" y="3310128"/>
+            <a:ext cx="2697480" cy="347472"/>
+          </a:xfrm>
+          <a:prstGeom prst="rect">
+            <a:avLst/>
+          </a:prstGeom>
+          <a:noFill/>
+          <a:ln/>
+        </p:spPr>
+        <p:txBody>
+          <a:bodyPr wrap="square" lIns="0" tIns="0" rIns="0" bIns="0" rtlCol="0" anchor="ctr"/>
+          <a:lstStyle/>
+          <a:p>
+            <a:pPr algn="ctr" indent="0" marL="0">
+              <a:buNone/>
+            </a:pPr>
+            <a:r>
+              <a:rPr lang="en-US" sz="1300" b="1" dirty="0">
+                <a:solidFill>
+                  <a:srgbClr val="FFFFFF"/>
+                </a:solidFill>
+              </a:rPr>
+              <a:t>Metrics</a:t>
+            </a:r>
+            <a:endParaRPr lang="en-US" sz="1300" dirty="0"/>
+          </a:p>
+        </p:txBody>
+      </p:sp>
+      <p:sp>
+        <p:nvSpPr>
+          <p:cNvPr id="21" name="Text 19"/>
+          <p:cNvSpPr/>
+          <p:nvPr/>
+        </p:nvSpPr>
+        <p:spPr>
+          <a:xfrm>
+            <a:off x="3264408" y="3730752"/>
+            <a:ext cx="2514600" cy="347472"/>
           </a:xfrm>
           <a:prstGeom prst="rect">
             <a:avLst/>
@@ -6338,10 +7201,46 @@
             <a:r>
               <a:rPr lang="en-US" sz="1050" dirty="0">
                 <a:solidFill>
+                  <a:srgbClr val="8096B0"/>
+                </a:solidFill>
+              </a:rPr>
+              <a:t>Traditional: Latency, error rate</a:t>
+            </a:r>
+            <a:endParaRPr lang="en-US" sz="1050" dirty="0"/>
+          </a:p>
+        </p:txBody>
+      </p:sp>
+      <p:sp>
+        <p:nvSpPr>
+          <p:cNvPr id="22" name="Text 20"/>
+          <p:cNvSpPr/>
+          <p:nvPr/>
+        </p:nvSpPr>
+        <p:spPr>
+          <a:xfrm>
+            <a:off x="3264408" y="4133088"/>
+            <a:ext cx="2514600" cy="621792"/>
+          </a:xfrm>
+          <a:prstGeom prst="rect">
+            <a:avLst/>
+          </a:prstGeom>
+          <a:noFill/>
+          <a:ln/>
+        </p:spPr>
+        <p:txBody>
+          <a:bodyPr wrap="square" lIns="0" tIns="0" rIns="0" bIns="0" rtlCol="0" anchor="ctr"/>
+          <a:lstStyle/>
+          <a:p>
+            <a:pPr indent="0" marL="0">
+              <a:buNone/>
+            </a:pPr>
+            <a:r>
+              <a:rPr lang="en-US" sz="1050" dirty="0">
+                <a:solidFill>
                   <a:srgbClr val="D4E4F0"/>
                 </a:solidFill>
               </a:rPr>
-              <a:t>Types every line. Owns syntax, logic, and tests.</a:t>
+              <a:t>+ Agentic: Token usage, cost per task, tool call frequency, retry rate</a:t>
             </a:r>
             <a:endParaRPr lang="en-US" sz="1050" dirty="0"/>
           </a:p>
@@ -6349,14 +7248,101 @@
       </p:sp>
       <p:sp>
         <p:nvSpPr>
-          <p:cNvPr id="12" name="Text 10"/>
-          <p:cNvSpPr/>
-          <p:nvPr/>
-        </p:nvSpPr>
-        <p:spPr>
-          <a:xfrm>
-            <a:off x="5486400" y="2286000"/>
-            <a:ext cx="3200400" cy="621792"/>
+          <p:cNvPr id="23" name="Shape 21"/>
+          <p:cNvSpPr/>
+          <p:nvPr/>
+        </p:nvSpPr>
+        <p:spPr>
+          <a:xfrm>
+            <a:off x="6025896" y="3310128"/>
+            <a:ext cx="2697480" cy="1481328"/>
+          </a:xfrm>
+          <a:prstGeom prst="rect">
+            <a:avLst/>
+          </a:prstGeom>
+          <a:solidFill>
+            <a:srgbClr val="2E5073">
+              <a:alpha val="85000"/>
+            </a:srgbClr>
+          </a:solidFill>
+          <a:ln/>
+          <a:effectLst>
+            <a:outerShdw sx="100000" sy="100000" kx="0" ky="0" algn="bl" rotWithShape="0" blurRad="101600" dist="38100" dir="8100000">
+              <a:srgbClr val="000000">
+                <a:alpha val="13000"/>
+              </a:srgbClr>
+            </a:outerShdw>
+          </a:effectLst>
+        </p:spPr>
+      </p:sp>
+      <p:sp>
+        <p:nvSpPr>
+          <p:cNvPr id="24" name="Shape 22"/>
+          <p:cNvSpPr/>
+          <p:nvPr/>
+        </p:nvSpPr>
+        <p:spPr>
+          <a:xfrm>
+            <a:off x="6025896" y="3310128"/>
+            <a:ext cx="2697480" cy="347472"/>
+          </a:xfrm>
+          <a:prstGeom prst="rect">
+            <a:avLst/>
+          </a:prstGeom>
+          <a:solidFill>
+            <a:srgbClr val="3A7E6E">
+              <a:alpha val="95000"/>
+            </a:srgbClr>
+          </a:solidFill>
+          <a:ln/>
+        </p:spPr>
+      </p:sp>
+      <p:sp>
+        <p:nvSpPr>
+          <p:cNvPr id="25" name="Text 23"/>
+          <p:cNvSpPr/>
+          <p:nvPr/>
+        </p:nvSpPr>
+        <p:spPr>
+          <a:xfrm>
+            <a:off x="6025896" y="3310128"/>
+            <a:ext cx="2697480" cy="347472"/>
+          </a:xfrm>
+          <a:prstGeom prst="rect">
+            <a:avLst/>
+          </a:prstGeom>
+          <a:noFill/>
+          <a:ln/>
+        </p:spPr>
+        <p:txBody>
+          <a:bodyPr wrap="square" lIns="0" tIns="0" rIns="0" bIns="0" rtlCol="0" anchor="ctr"/>
+          <a:lstStyle/>
+          <a:p>
+            <a:pPr algn="ctr" indent="0" marL="0">
+              <a:buNone/>
+            </a:pPr>
+            <a:r>
+              <a:rPr lang="en-US" sz="1300" b="1" dirty="0">
+                <a:solidFill>
+                  <a:srgbClr val="FFFFFF"/>
+                </a:solidFill>
+              </a:rPr>
+              <a:t>Traces</a:t>
+            </a:r>
+            <a:endParaRPr lang="en-US" sz="1300" dirty="0"/>
+          </a:p>
+        </p:txBody>
+      </p:sp>
+      <p:sp>
+        <p:nvSpPr>
+          <p:cNvPr id="26" name="Text 24"/>
+          <p:cNvSpPr/>
+          <p:nvPr/>
+        </p:nvSpPr>
+        <p:spPr>
+          <a:xfrm>
+            <a:off x="6117336" y="3730752"/>
+            <a:ext cx="2514600" cy="347472"/>
           </a:xfrm>
           <a:prstGeom prst="rect">
             <a:avLst/>
@@ -6374,10 +7360,10 @@
             <a:r>
               <a:rPr lang="en-US" sz="1050" dirty="0">
                 <a:solidFill>
-                  <a:srgbClr val="FFFFFF"/>
-                </a:solidFill>
-              </a:rPr>
-              <a:t>Defines intent via spec and AC. Reviews and approves agent output.</a:t>
+                  <a:srgbClr val="8096B0"/>
+                </a:solidFill>
+              </a:rPr>
+              <a:t>Traditional: Request span tree</a:t>
             </a:r>
             <a:endParaRPr lang="en-US" sz="1050" dirty="0"/>
           </a:p>
@@ -6385,72 +7371,14 @@
       </p:sp>
       <p:sp>
         <p:nvSpPr>
-          <p:cNvPr id="13" name="Shape 11"/>
-          <p:cNvSpPr/>
-          <p:nvPr/>
-        </p:nvSpPr>
-        <p:spPr>
-          <a:xfrm>
-            <a:off x="320040" y="2962656"/>
-            <a:ext cx="8503920" cy="621792"/>
-          </a:xfrm>
-          <a:prstGeom prst="rect">
-            <a:avLst/>
-          </a:prstGeom>
-          <a:solidFill>
-            <a:srgbClr val="2A4870">
-              <a:alpha val="75000"/>
-            </a:srgbClr>
-          </a:solidFill>
-          <a:ln/>
-        </p:spPr>
-      </p:sp>
-      <p:sp>
-        <p:nvSpPr>
-          <p:cNvPr id="14" name="Text 12"/>
-          <p:cNvSpPr/>
-          <p:nvPr/>
-        </p:nvSpPr>
-        <p:spPr>
-          <a:xfrm>
-            <a:off x="411480" y="2962656"/>
-            <a:ext cx="1691640" cy="621792"/>
-          </a:xfrm>
-          <a:prstGeom prst="rect">
-            <a:avLst/>
-          </a:prstGeom>
-          <a:noFill/>
-          <a:ln/>
-        </p:spPr>
-        <p:txBody>
-          <a:bodyPr wrap="square" lIns="0" tIns="0" rIns="0" bIns="0" rtlCol="0" anchor="ctr"/>
-          <a:lstStyle/>
-          <a:p>
-            <a:pPr indent="0" marL="0">
-              <a:buNone/>
-            </a:pPr>
-            <a:r>
-              <a:rPr lang="en-US" sz="1200" b="1" dirty="0">
-                <a:solidFill>
-                  <a:srgbClr val="5B8DB8"/>
-                </a:solidFill>
-              </a:rPr>
-              <a:t>Architect</a:t>
-            </a:r>
-            <a:endParaRPr lang="en-US" sz="1200" dirty="0"/>
-          </a:p>
-        </p:txBody>
-      </p:sp>
-      <p:sp>
-        <p:nvSpPr>
-          <p:cNvPr id="15" name="Text 13"/>
-          <p:cNvSpPr/>
-          <p:nvPr/>
-        </p:nvSpPr>
-        <p:spPr>
-          <a:xfrm>
-            <a:off x="2194560" y="2962656"/>
-            <a:ext cx="3108960" cy="621792"/>
+          <p:cNvPr id="27" name="Text 25"/>
+          <p:cNvSpPr/>
+          <p:nvPr/>
+        </p:nvSpPr>
+        <p:spPr>
+          <a:xfrm>
+            <a:off x="6117336" y="4133088"/>
+            <a:ext cx="2514600" cy="621792"/>
           </a:xfrm>
           <a:prstGeom prst="rect">
             <a:avLst/>
@@ -6471,303 +7399,7 @@
                   <a:srgbClr val="D4E4F0"/>
                 </a:solidFill>
               </a:rPr>
-              <a:t>Designs system, documents decisions after-the-fact.</a:t>
-            </a:r>
-            <a:endParaRPr lang="en-US" sz="1050" dirty="0"/>
-          </a:p>
-        </p:txBody>
-      </p:sp>
-      <p:sp>
-        <p:nvSpPr>
-          <p:cNvPr id="16" name="Text 14"/>
-          <p:cNvSpPr/>
-          <p:nvPr/>
-        </p:nvSpPr>
-        <p:spPr>
-          <a:xfrm>
-            <a:off x="5486400" y="2962656"/>
-            <a:ext cx="3200400" cy="621792"/>
-          </a:xfrm>
-          <a:prstGeom prst="rect">
-            <a:avLst/>
-          </a:prstGeom>
-          <a:noFill/>
-          <a:ln/>
-        </p:spPr>
-        <p:txBody>
-          <a:bodyPr wrap="square" lIns="0" tIns="0" rIns="0" bIns="0" rtlCol="0" anchor="ctr"/>
-          <a:lstStyle/>
-          <a:p>
-            <a:pPr indent="0" marL="0">
-              <a:buNone/>
-            </a:pPr>
-            <a:r>
-              <a:rPr lang="en-US" sz="1050" dirty="0">
-                <a:solidFill>
-                  <a:srgbClr val="FFFFFF"/>
-                </a:solidFill>
-              </a:rPr>
-              <a:t>Designs agent architecture, reviews plans, signs off before implementation.</a:t>
-            </a:r>
-            <a:endParaRPr lang="en-US" sz="1050" dirty="0"/>
-          </a:p>
-        </p:txBody>
-      </p:sp>
-      <p:sp>
-        <p:nvSpPr>
-          <p:cNvPr id="17" name="Shape 15"/>
-          <p:cNvSpPr/>
-          <p:nvPr/>
-        </p:nvSpPr>
-        <p:spPr>
-          <a:xfrm>
-            <a:off x="320040" y="3639312"/>
-            <a:ext cx="8503920" cy="621792"/>
-          </a:xfrm>
-          <a:prstGeom prst="rect">
-            <a:avLst/>
-          </a:prstGeom>
-          <a:solidFill>
-            <a:srgbClr val="2E5073">
-              <a:alpha val="75000"/>
-            </a:srgbClr>
-          </a:solidFill>
-          <a:ln/>
-        </p:spPr>
-      </p:sp>
-      <p:sp>
-        <p:nvSpPr>
-          <p:cNvPr id="18" name="Text 16"/>
-          <p:cNvSpPr/>
-          <p:nvPr/>
-        </p:nvSpPr>
-        <p:spPr>
-          <a:xfrm>
-            <a:off x="411480" y="3639312"/>
-            <a:ext cx="1691640" cy="621792"/>
-          </a:xfrm>
-          <a:prstGeom prst="rect">
-            <a:avLst/>
-          </a:prstGeom>
-          <a:noFill/>
-          <a:ln/>
-        </p:spPr>
-        <p:txBody>
-          <a:bodyPr wrap="square" lIns="0" tIns="0" rIns="0" bIns="0" rtlCol="0" anchor="ctr"/>
-          <a:lstStyle/>
-          <a:p>
-            <a:pPr indent="0" marL="0">
-              <a:buNone/>
-            </a:pPr>
-            <a:r>
-              <a:rPr lang="en-US" sz="1200" b="1" dirty="0">
-                <a:solidFill>
-                  <a:srgbClr val="5B8DB8"/>
-                </a:solidFill>
-              </a:rPr>
-              <a:t>Tech Lead</a:t>
-            </a:r>
-            <a:endParaRPr lang="en-US" sz="1200" dirty="0"/>
-          </a:p>
-        </p:txBody>
-      </p:sp>
-      <p:sp>
-        <p:nvSpPr>
-          <p:cNvPr id="19" name="Text 17"/>
-          <p:cNvSpPr/>
-          <p:nvPr/>
-        </p:nvSpPr>
-        <p:spPr>
-          <a:xfrm>
-            <a:off x="2194560" y="3639312"/>
-            <a:ext cx="3108960" cy="621792"/>
-          </a:xfrm>
-          <a:prstGeom prst="rect">
-            <a:avLst/>
-          </a:prstGeom>
-          <a:noFill/>
-          <a:ln/>
-        </p:spPr>
-        <p:txBody>
-          <a:bodyPr wrap="square" lIns="0" tIns="0" rIns="0" bIns="0" rtlCol="0" anchor="ctr"/>
-          <a:lstStyle/>
-          <a:p>
-            <a:pPr indent="0" marL="0">
-              <a:buNone/>
-            </a:pPr>
-            <a:r>
-              <a:rPr lang="en-US" sz="1050" dirty="0">
-                <a:solidFill>
-                  <a:srgbClr val="D4E4F0"/>
-                </a:solidFill>
-              </a:rPr>
-              <a:t>Writes code alongside team. Reviews human PRs.</a:t>
-            </a:r>
-            <a:endParaRPr lang="en-US" sz="1050" dirty="0"/>
-          </a:p>
-        </p:txBody>
-      </p:sp>
-      <p:sp>
-        <p:nvSpPr>
-          <p:cNvPr id="20" name="Text 18"/>
-          <p:cNvSpPr/>
-          <p:nvPr/>
-        </p:nvSpPr>
-        <p:spPr>
-          <a:xfrm>
-            <a:off x="5486400" y="3639312"/>
-            <a:ext cx="3200400" cy="621792"/>
-          </a:xfrm>
-          <a:prstGeom prst="rect">
-            <a:avLst/>
-          </a:prstGeom>
-          <a:noFill/>
-          <a:ln/>
-        </p:spPr>
-        <p:txBody>
-          <a:bodyPr wrap="square" lIns="0" tIns="0" rIns="0" bIns="0" rtlCol="0" anchor="ctr"/>
-          <a:lstStyle/>
-          <a:p>
-            <a:pPr indent="0" marL="0">
-              <a:buNone/>
-            </a:pPr>
-            <a:r>
-              <a:rPr lang="en-US" sz="1050" dirty="0">
-                <a:solidFill>
-                  <a:srgbClr val="FFFFFF"/>
-                </a:solidFill>
-              </a:rPr>
-              <a:t>Approves agent plans and task lists. Sets HITL gates. Owns verification criteria.</a:t>
-            </a:r>
-            <a:endParaRPr lang="en-US" sz="1050" dirty="0"/>
-          </a:p>
-        </p:txBody>
-      </p:sp>
-      <p:sp>
-        <p:nvSpPr>
-          <p:cNvPr id="21" name="Shape 19"/>
-          <p:cNvSpPr/>
-          <p:nvPr/>
-        </p:nvSpPr>
-        <p:spPr>
-          <a:xfrm>
-            <a:off x="320040" y="4315968"/>
-            <a:ext cx="8503920" cy="621792"/>
-          </a:xfrm>
-          <a:prstGeom prst="rect">
-            <a:avLst/>
-          </a:prstGeom>
-          <a:solidFill>
-            <a:srgbClr val="2A4870">
-              <a:alpha val="75000"/>
-            </a:srgbClr>
-          </a:solidFill>
-          <a:ln/>
-        </p:spPr>
-      </p:sp>
-      <p:sp>
-        <p:nvSpPr>
-          <p:cNvPr id="22" name="Text 20"/>
-          <p:cNvSpPr/>
-          <p:nvPr/>
-        </p:nvSpPr>
-        <p:spPr>
-          <a:xfrm>
-            <a:off x="411480" y="4315968"/>
-            <a:ext cx="1691640" cy="621792"/>
-          </a:xfrm>
-          <a:prstGeom prst="rect">
-            <a:avLst/>
-          </a:prstGeom>
-          <a:noFill/>
-          <a:ln/>
-        </p:spPr>
-        <p:txBody>
-          <a:bodyPr wrap="square" lIns="0" tIns="0" rIns="0" bIns="0" rtlCol="0" anchor="ctr"/>
-          <a:lstStyle/>
-          <a:p>
-            <a:pPr indent="0" marL="0">
-              <a:buNone/>
-            </a:pPr>
-            <a:r>
-              <a:rPr lang="en-US" sz="1200" b="1" dirty="0">
-                <a:solidFill>
-                  <a:srgbClr val="5B8DB8"/>
-                </a:solidFill>
-              </a:rPr>
-              <a:t>Engineering Manager</a:t>
-            </a:r>
-            <a:endParaRPr lang="en-US" sz="1200" dirty="0"/>
-          </a:p>
-        </p:txBody>
-      </p:sp>
-      <p:sp>
-        <p:nvSpPr>
-          <p:cNvPr id="23" name="Text 21"/>
-          <p:cNvSpPr/>
-          <p:nvPr/>
-        </p:nvSpPr>
-        <p:spPr>
-          <a:xfrm>
-            <a:off x="2194560" y="4315968"/>
-            <a:ext cx="3108960" cy="621792"/>
-          </a:xfrm>
-          <a:prstGeom prst="rect">
-            <a:avLst/>
-          </a:prstGeom>
-          <a:noFill/>
-          <a:ln/>
-        </p:spPr>
-        <p:txBody>
-          <a:bodyPr wrap="square" lIns="0" tIns="0" rIns="0" bIns="0" rtlCol="0" anchor="ctr"/>
-          <a:lstStyle/>
-          <a:p>
-            <a:pPr indent="0" marL="0">
-              <a:buNone/>
-            </a:pPr>
-            <a:r>
-              <a:rPr lang="en-US" sz="1050" dirty="0">
-                <a:solidFill>
-                  <a:srgbClr val="D4E4F0"/>
-                </a:solidFill>
-              </a:rPr>
-              <a:t>Tracks velocity, manages human developers.</a:t>
-            </a:r>
-            <a:endParaRPr lang="en-US" sz="1050" dirty="0"/>
-          </a:p>
-        </p:txBody>
-      </p:sp>
-      <p:sp>
-        <p:nvSpPr>
-          <p:cNvPr id="24" name="Text 22"/>
-          <p:cNvSpPr/>
-          <p:nvPr/>
-        </p:nvSpPr>
-        <p:spPr>
-          <a:xfrm>
-            <a:off x="5486400" y="4315968"/>
-            <a:ext cx="3200400" cy="621792"/>
-          </a:xfrm>
-          <a:prstGeom prst="rect">
-            <a:avLst/>
-          </a:prstGeom>
-          <a:noFill/>
-          <a:ln/>
-        </p:spPr>
-        <p:txBody>
-          <a:bodyPr wrap="square" lIns="0" tIns="0" rIns="0" bIns="0" rtlCol="0" anchor="ctr"/>
-          <a:lstStyle/>
-          <a:p>
-            <a:pPr indent="0" marL="0">
-              <a:buNone/>
-            </a:pPr>
-            <a:r>
-              <a:rPr lang="en-US" sz="1050" dirty="0">
-                <a:solidFill>
-                  <a:srgbClr val="FFFFFF"/>
-                </a:solidFill>
-              </a:rPr>
-              <a:t>Tracks agent throughput, manages context quality, defines DoD and review standards.</a:t>
+              <a:t>+ Agentic: Agent reasoning spans, multi-agent call graph, compaction events</a:t>
             </a:r>
             <a:endParaRPr lang="en-US" sz="1050" dirty="0"/>
           </a:p>

--- a/slides/Module_06_Review_Hygiene.pptx
+++ b/slides/Module_06_Review_Hygiene.pptx
@@ -6720,7 +6720,7 @@
                   <a:srgbClr val="FFFFFF"/>
                 </a:solidFill>
               </a:rPr>
-              <a:t>PROGRAMME SCOPE NOTE  —  TWO LEVELS</a:t>
+              <a:t>PROGRAM SCOPE NOTE  —  TWO LEVELS</a:t>
             </a:r>
             <a:endParaRPr lang="en-US" sz="1200" dirty="0"/>
           </a:p>
@@ -9612,7 +9612,7 @@
                   <a:srgbClr val="1C3557"/>
                 </a:solidFill>
               </a:rPr>
-              <a:t>6. Does behaviour match intent?</a:t>
+              <a:t>6. Does behavior match intent?</a:t>
             </a:r>
             <a:endParaRPr lang="en-US" sz="1200" dirty="0"/>
           </a:p>
@@ -14030,7 +14030,7 @@
                   <a:srgbClr val="1E2D3D"/>
                 </a:solidFill>
               </a:rPr>
-              <a:t>Update SPEC.md with clarifications, new AC, or corrected non-goals. Update CLAUDE.md or Skills if agent behaviour needs tuning.</a:t>
+              <a:t>Update SPEC.md with clarifications, new AC, or corrected non-goals. Update CLAUDE.md or Skills if agent behavior needs tuning.</a:t>
             </a:r>
             <a:endParaRPr lang="en-US" sz="1100" dirty="0"/>
           </a:p>
